--- a/ppt_1.pptx
+++ b/ppt_1.pptx
@@ -5,10 +5,10 @@
     <p:sldMasterId id="2147483660" r:id="rId1"/>
   </p:sldMasterIdLst>
   <p:notesMasterIdLst>
-    <p:notesMasterId r:id="rId15"/>
+    <p:notesMasterId r:id="rId16"/>
   </p:notesMasterIdLst>
   <p:handoutMasterIdLst>
-    <p:handoutMasterId r:id="rId16"/>
+    <p:handoutMasterId r:id="rId17"/>
   </p:handoutMasterIdLst>
   <p:sldIdLst>
     <p:sldId id="310" r:id="rId2"/>
@@ -19,12 +19,12 @@
     <p:sldId id="341" r:id="rId7"/>
     <p:sldId id="336" r:id="rId8"/>
     <p:sldId id="324" r:id="rId9"/>
-    <p:sldId id="352" r:id="rId21"/>
-    <p:sldId id="347" r:id="rId10"/>
-    <p:sldId id="329" r:id="rId11"/>
-    <p:sldId id="349" r:id="rId12"/>
-    <p:sldId id="348" r:id="rId13"/>
-    <p:sldId id="331" r:id="rId14"/>
+    <p:sldId id="352" r:id="rId10"/>
+    <p:sldId id="347" r:id="rId11"/>
+    <p:sldId id="329" r:id="rId12"/>
+    <p:sldId id="349" r:id="rId13"/>
+    <p:sldId id="348" r:id="rId14"/>
+    <p:sldId id="331" r:id="rId15"/>
   </p:sldIdLst>
   <p:sldSz cx="9144000" cy="6858000" type="screen4x3"/>
   <p:notesSz cx="6858000" cy="9144000"/>
@@ -239,7 +239,7 @@
             <a:fld id="{43472FC0-3A6E-4FDF-98C7-05D53ADA3185}" type="datetimeFigureOut">
               <a:rPr lang="en-US" smtClean="0"/>
               <a:pPr/>
-              <a:t>8/10/2026</a:t>
+              <a:t>8/11/2026</a:t>
             </a:fld>
             <a:endParaRPr lang="en-US"/>
           </a:p>
@@ -462,7 +462,7 @@
             <a:fld id="{D5F44B48-72A2-4A15-9A9B-0DA2BF7C6B02}" type="datetimeFigureOut">
               <a:rPr lang="en-US" smtClean="0"/>
               <a:pPr/>
-              <a:t>8/10/2026</a:t>
+              <a:t>8/11/2026</a:t>
             </a:fld>
             <a:endParaRPr lang="en-US"/>
           </a:p>
@@ -1191,7 +1191,7 @@
             <a:fld id="{6D6E7C27-16C2-4FD5-8EDE-FBC75B02CAE1}" type="datetime3">
               <a:rPr lang="en-US" smtClean="0"/>
               <a:pPr/>
-              <a:t>10 August 2026</a:t>
+              <a:t>11 August 2026</a:t>
             </a:fld>
             <a:endParaRPr lang="en-US"/>
           </a:p>
@@ -1364,7 +1364,7 @@
             <a:fld id="{2B17E129-FEC6-4F1C-87DA-3FA2731984DA}" type="datetime3">
               <a:rPr lang="en-US" smtClean="0"/>
               <a:pPr/>
-              <a:t>10 August 2026</a:t>
+              <a:t>11 August 2026</a:t>
             </a:fld>
             <a:endParaRPr lang="en-US"/>
           </a:p>
@@ -1547,7 +1547,7 @@
             <a:fld id="{4CAEDB6C-4E1E-4281-A1E0-61DF76DC1030}" type="datetime3">
               <a:rPr lang="en-US" smtClean="0"/>
               <a:pPr/>
-              <a:t>10 August 2026</a:t>
+              <a:t>11 August 2026</a:t>
             </a:fld>
             <a:endParaRPr lang="en-US"/>
           </a:p>
@@ -1726,7 +1726,7 @@
             <a:fld id="{022C0B77-B5C0-41D3-97D7-210C8A431946}" type="datetime3">
               <a:rPr lang="en-US" smtClean="0"/>
               <a:pPr/>
-              <a:t>10 August 2026</a:t>
+              <a:t>11 August 2026</a:t>
             </a:fld>
             <a:endParaRPr lang="en-US" dirty="0"/>
           </a:p>
@@ -1948,7 +1948,7 @@
             <a:fld id="{DD1A6F9D-DD77-42A7-A6AB-57439E778FC8}" type="datetime3">
               <a:rPr lang="en-US" smtClean="0"/>
               <a:pPr/>
-              <a:t>10 August 2026</a:t>
+              <a:t>11 August 2026</a:t>
             </a:fld>
             <a:endParaRPr lang="en-US"/>
           </a:p>
@@ -2198,7 +2198,7 @@
             <a:fld id="{BCBA0253-5212-49C0-B220-868D06335A5E}" type="datetime3">
               <a:rPr lang="en-US" smtClean="0"/>
               <a:pPr/>
-              <a:t>10 August 2026</a:t>
+              <a:t>11 August 2026</a:t>
             </a:fld>
             <a:endParaRPr lang="en-US"/>
           </a:p>
@@ -2488,7 +2488,7 @@
             <a:fld id="{BAC9E232-9D5D-4D27-AF47-61E4C4587D76}" type="datetime3">
               <a:rPr lang="en-US" smtClean="0"/>
               <a:pPr/>
-              <a:t>10 August 2026</a:t>
+              <a:t>11 August 2026</a:t>
             </a:fld>
             <a:endParaRPr lang="en-US"/>
           </a:p>
@@ -2912,7 +2912,7 @@
             <a:fld id="{5079B3BB-114E-4111-8052-0BC0558AA05F}" type="datetime3">
               <a:rPr lang="en-US" smtClean="0"/>
               <a:pPr/>
-              <a:t>10 August 2026</a:t>
+              <a:t>11 August 2026</a:t>
             </a:fld>
             <a:endParaRPr lang="en-US"/>
           </a:p>
@@ -3034,7 +3034,7 @@
             <a:fld id="{90D305F7-9DF8-482F-A92F-377DE8B06454}" type="datetime3">
               <a:rPr lang="en-US" smtClean="0"/>
               <a:pPr/>
-              <a:t>10 August 2026</a:t>
+              <a:t>11 August 2026</a:t>
             </a:fld>
             <a:endParaRPr lang="en-US"/>
           </a:p>
@@ -3134,7 +3134,7 @@
             <a:fld id="{CAC629EA-6B2E-4077-9690-3164A6869B63}" type="datetime3">
               <a:rPr lang="en-US" smtClean="0"/>
               <a:pPr/>
-              <a:t>10 August 2026</a:t>
+              <a:t>11 August 2026</a:t>
             </a:fld>
             <a:endParaRPr lang="en-US"/>
           </a:p>
@@ -3414,7 +3414,7 @@
             <a:fld id="{AE750F3F-5DBE-4A29-BC4C-5DBB7AA3E72C}" type="datetime3">
               <a:rPr lang="en-US" smtClean="0"/>
               <a:pPr/>
-              <a:t>10 August 2026</a:t>
+              <a:t>11 August 2026</a:t>
             </a:fld>
             <a:endParaRPr lang="en-US"/>
           </a:p>
@@ -3671,7 +3671,7 @@
             <a:fld id="{0F44D7CD-DC6B-447A-B516-2D668A535C98}" type="datetime3">
               <a:rPr lang="en-US" smtClean="0"/>
               <a:pPr/>
-              <a:t>10 August 2026</a:t>
+              <a:t>11 August 2026</a:t>
             </a:fld>
             <a:endParaRPr lang="en-US"/>
           </a:p>
@@ -3887,7 +3887,7 @@
             <a:fld id="{5168C00D-D945-4F51-B787-E058BBE42DC9}" type="datetime3">
               <a:rPr lang="en-US" smtClean="0"/>
               <a:pPr/>
-              <a:t>10 August 2026</a:t>
+              <a:t>11 August 2026</a:t>
             </a:fld>
             <a:endParaRPr lang="en-US"/>
           </a:p>
@@ -4818,6 +4818,590 @@
       </p:grpSpPr>
       <p:sp>
         <p:nvSpPr>
+          <p:cNvPr id="2" name="Title 1"/>
+          <p:cNvSpPr>
+            <a:spLocks noGrp="1"/>
+          </p:cNvSpPr>
+          <p:nvPr>
+            <p:ph type="title"/>
+          </p:nvPr>
+        </p:nvSpPr>
+        <p:spPr>
+          <a:xfrm>
+            <a:off x="298940" y="188640"/>
+            <a:ext cx="8593540" cy="1008112"/>
+          </a:xfrm>
+        </p:spPr>
+        <p:txBody>
+          <a:bodyPr>
+            <a:normAutofit/>
+          </a:bodyPr>
+          <a:lstStyle/>
+          <a:p>
+            <a:pPr>
+              <a:spcBef>
+                <a:spcPts val="0"/>
+              </a:spcBef>
+              <a:spcAft>
+                <a:spcPts val="0"/>
+              </a:spcAft>
+              <a:buNone/>
+            </a:pPr>
+            <a:r>
+              <a:rPr lang="en-US" sz="2400" b="1" dirty="0">
+                <a:solidFill>
+                  <a:srgbClr val="8B0000"/>
+                </a:solidFill>
+                <a:latin typeface="Times New Roman" panose="02020603050405020304" pitchFamily="18" charset="0"/>
+              </a:rPr>
+              <a:t>Methodology – Four Layer Pipeline Architecture</a:t>
+            </a:r>
+          </a:p>
+        </p:txBody>
+      </p:sp>
+      <p:graphicFrame>
+        <p:nvGraphicFramePr>
+          <p:cNvPr id="4" name="Table 3">
+            <a:extLst>
+              <a:ext uri="{FF2B5EF4-FFF2-40B4-BE49-F238E27FC236}">
+                <a16:creationId xmlns:a16="http://schemas.microsoft.com/office/drawing/2014/main" id="{98B7C7A9-1323-CCD5-7514-AFF5EF4FFBDB}"/>
+              </a:ext>
+            </a:extLst>
+          </p:cNvPr>
+          <p:cNvGraphicFramePr>
+            <a:graphicFrameLocks noGrp="1"/>
+          </p:cNvGraphicFramePr>
+          <p:nvPr>
+            <p:extLst>
+              <p:ext uri="{D42A27DB-BD31-4B8C-83A1-F6EECF244321}">
+                <p14:modId xmlns:p14="http://schemas.microsoft.com/office/powerpoint/2010/main" val="256273367"/>
+              </p:ext>
+            </p:extLst>
+          </p:nvPr>
+        </p:nvGraphicFramePr>
+        <p:xfrm>
+          <a:off x="317500" y="1196752"/>
+          <a:ext cx="8574980" cy="5511910"/>
+        </p:xfrm>
+        <a:graphic>
+          <a:graphicData uri="http://schemas.openxmlformats.org/drawingml/2006/table">
+            <a:tbl>
+              <a:tblPr firstRow="1" bandRow="1">
+                <a:tableStyleId>{5C22544A-7EE6-4342-B048-85BDC9FD1C3A}</a:tableStyleId>
+              </a:tblPr>
+              <a:tblGrid>
+                <a:gridCol w="1599810">
+                  <a:extLst>
+                    <a:ext uri="{9D8B030D-6E8A-4147-A177-3AD203B41FA5}">
+                      <a16:colId xmlns:a16="http://schemas.microsoft.com/office/drawing/2014/main" val="771754902"/>
+                    </a:ext>
+                  </a:extLst>
+                </a:gridCol>
+                <a:gridCol w="3007642">
+                  <a:extLst>
+                    <a:ext uri="{9D8B030D-6E8A-4147-A177-3AD203B41FA5}">
+                      <a16:colId xmlns:a16="http://schemas.microsoft.com/office/drawing/2014/main" val="3485524538"/>
+                    </a:ext>
+                  </a:extLst>
+                </a:gridCol>
+                <a:gridCol w="3967528">
+                  <a:extLst>
+                    <a:ext uri="{9D8B030D-6E8A-4147-A177-3AD203B41FA5}">
+                      <a16:colId xmlns:a16="http://schemas.microsoft.com/office/drawing/2014/main" val="3380436145"/>
+                    </a:ext>
+                  </a:extLst>
+                </a:gridCol>
+              </a:tblGrid>
+              <a:tr h="1102382">
+                <a:tc>
+                  <a:txBody>
+                    <a:bodyPr/>
+                    <a:lstStyle/>
+                    <a:p>
+                      <a:r>
+                        <a:rPr lang="en-IN" sz="1300" b="1">
+                          <a:solidFill>
+                            <a:srgbClr val="FFFFFF"/>
+                          </a:solidFill>
+                          <a:latin typeface="Times New Roman" panose="02020603050405020304" pitchFamily="18" charset="0"/>
+                        </a:rPr>
+                        <a:t>Pipeline Layer</a:t>
+                      </a:r>
+                    </a:p>
+                  </a:txBody>
+                  <a:tcPr>
+                    <a:solidFill>
+                      <a:srgbClr val="8B0000"/>
+                    </a:solidFill>
+                  </a:tcPr>
+                </a:tc>
+                <a:tc>
+                  <a:txBody>
+                    <a:bodyPr/>
+                    <a:lstStyle/>
+                    <a:p>
+                      <a:r>
+                        <a:rPr lang="en-IN" sz="1300" b="1" dirty="0">
+                          <a:solidFill>
+                            <a:srgbClr val="FFFFFF"/>
+                          </a:solidFill>
+                          <a:latin typeface="Times New Roman" panose="02020603050405020304" pitchFamily="18" charset="0"/>
+                        </a:rPr>
+                        <a:t>Hardware &amp; Components</a:t>
+                      </a:r>
+                    </a:p>
+                  </a:txBody>
+                  <a:tcPr>
+                    <a:solidFill>
+                      <a:srgbClr val="8B0000"/>
+                    </a:solidFill>
+                  </a:tcPr>
+                </a:tc>
+                <a:tc>
+                  <a:txBody>
+                    <a:bodyPr/>
+                    <a:lstStyle/>
+                    <a:p>
+                      <a:r>
+                        <a:rPr lang="en-IN" sz="1300" b="1">
+                          <a:solidFill>
+                            <a:srgbClr val="FFFFFF"/>
+                          </a:solidFill>
+                          <a:latin typeface="Times New Roman" panose="02020603050405020304" pitchFamily="18" charset="0"/>
+                        </a:rPr>
+                        <a:t>Operational Mechanism &amp; Signal Flow</a:t>
+                      </a:r>
+                    </a:p>
+                  </a:txBody>
+                  <a:tcPr>
+                    <a:solidFill>
+                      <a:srgbClr val="8B0000"/>
+                    </a:solidFill>
+                  </a:tcPr>
+                </a:tc>
+                <a:extLst>
+                  <a:ext uri="{0D108BD9-81ED-4DB2-BD59-A6C34878D82A}">
+                    <a16:rowId xmlns:a16="http://schemas.microsoft.com/office/drawing/2014/main" val="3631563013"/>
+                  </a:ext>
+                </a:extLst>
+              </a:tr>
+              <a:tr h="1102382">
+                <a:tc>
+                  <a:txBody>
+                    <a:bodyPr/>
+                    <a:lstStyle/>
+                    <a:p>
+                      <a:r>
+                        <a:rPr lang="en-IN" sz="1050" b="1">
+                          <a:solidFill>
+                            <a:srgbClr val="0A0A0A"/>
+                          </a:solidFill>
+                          <a:latin typeface="Times New Roman" panose="02020603050405020304" pitchFamily="18" charset="0"/>
+                        </a:rPr>
+                        <a:t>Layer 1: DETECT
+(Sensors)</a:t>
+                      </a:r>
+                    </a:p>
+                  </a:txBody>
+                  <a:tcPr>
+                    <a:solidFill>
+                      <a:srgbClr val="FFFFFF"/>
+                    </a:solidFill>
+                  </a:tcPr>
+                </a:tc>
+                <a:tc>
+                  <a:txBody>
+                    <a:bodyPr/>
+                    <a:lstStyle/>
+                    <a:p>
+                      <a:r>
+                        <a:rPr lang="en-IN" sz="1050" b="0">
+                          <a:solidFill>
+                            <a:srgbClr val="0A0A0A"/>
+                          </a:solidFill>
+                          <a:latin typeface="Times New Roman" panose="02020603050405020304" pitchFamily="18" charset="0"/>
+                        </a:rPr>
+                        <a:t>• LD2410C 24GHz mmWave Radar
+• IR Sensors (Door &amp; Window)
+• SW-420 Vibration Sensors (x2)
+• NEO-6M GPS Module
+• CCTV Camera (RPi CSI)</a:t>
+                      </a:r>
+                    </a:p>
+                  </a:txBody>
+                  <a:tcPr>
+                    <a:solidFill>
+                      <a:srgbClr val="FFFFFF"/>
+                    </a:solidFill>
+                  </a:tcPr>
+                </a:tc>
+                <a:tc>
+                  <a:txBody>
+                    <a:bodyPr/>
+                    <a:lstStyle/>
+                    <a:p>
+                      <a:r>
+                        <a:rPr lang="en-US" sz="1050" b="0" dirty="0">
+                          <a:solidFill>
+                            <a:srgbClr val="0A0A0A"/>
+                          </a:solidFill>
+                          <a:latin typeface="Times New Roman" panose="02020603050405020304" pitchFamily="18" charset="0"/>
+                        </a:rPr>
+                        <a:t>Fuses radar micro-breathing detection, IR beam-break, vibration triggers, and GPS location tracking. Sends real-time sensor signals to ESP32 coordinator.</a:t>
+                      </a:r>
+                      <a:endParaRPr lang="en-IN" sz="1050" b="0" dirty="0">
+                        <a:solidFill>
+                          <a:srgbClr val="0A0A0A"/>
+                        </a:solidFill>
+                        <a:latin typeface="Times New Roman" panose="02020603050405020304" pitchFamily="18" charset="0"/>
+                      </a:endParaRPr>
+                    </a:p>
+                  </a:txBody>
+                  <a:tcPr>
+                    <a:solidFill>
+                      <a:srgbClr val="FFFFFF"/>
+                    </a:solidFill>
+                  </a:tcPr>
+                </a:tc>
+                <a:extLst>
+                  <a:ext uri="{0D108BD9-81ED-4DB2-BD59-A6C34878D82A}">
+                    <a16:rowId xmlns:a16="http://schemas.microsoft.com/office/drawing/2014/main" val="416494945"/>
+                  </a:ext>
+                </a:extLst>
+              </a:tr>
+              <a:tr h="1102382">
+                <a:tc>
+                  <a:txBody>
+                    <a:bodyPr/>
+                    <a:lstStyle/>
+                    <a:p>
+                      <a:r>
+                        <a:rPr lang="en-IN" sz="1050" b="1">
+                          <a:solidFill>
+                            <a:srgbClr val="0A0A0A"/>
+                          </a:solidFill>
+                          <a:latin typeface="Times New Roman" panose="02020603050405020304" pitchFamily="18" charset="0"/>
+                        </a:rPr>
+                        <a:t>Layer 2: PROCESS
+(Edge-AI Fusion)</a:t>
+                      </a:r>
+                    </a:p>
+                  </a:txBody>
+                  <a:tcPr>
+                    <a:solidFill>
+                      <a:srgbClr val="F0F0F0"/>
+                    </a:solidFill>
+                  </a:tcPr>
+                </a:tc>
+                <a:tc>
+                  <a:txBody>
+                    <a:bodyPr/>
+                    <a:lstStyle/>
+                    <a:p>
+                      <a:r>
+                        <a:rPr lang="en-US" sz="1050" b="0" dirty="0">
+                          <a:solidFill>
+                            <a:srgbClr val="0A0A0A"/>
+                          </a:solidFill>
+                          <a:latin typeface="Times New Roman" panose="02020603050405020304" pitchFamily="18" charset="0"/>
+                        </a:rPr>
+                        <a:t>• ESP32 </a:t>
+                      </a:r>
+                      <a:r>
+                        <a:rPr lang="en-US" sz="1050" b="0" dirty="0" err="1">
+                          <a:solidFill>
+                            <a:srgbClr val="0A0A0A"/>
+                          </a:solidFill>
+                          <a:latin typeface="Times New Roman" panose="02020603050405020304" pitchFamily="18" charset="0"/>
+                        </a:rPr>
+                        <a:t>DevKit</a:t>
+                      </a:r>
+                      <a:r>
+                        <a:rPr lang="en-US" sz="1050" b="0" dirty="0">
+                          <a:solidFill>
+                            <a:srgbClr val="0A0A0A"/>
+                          </a:solidFill>
+                          <a:latin typeface="Times New Roman" panose="02020603050405020304" pitchFamily="18" charset="0"/>
+                        </a:rPr>
+                        <a:t> V1 (Main Hub)
+• Raspberry Pi Zero 2W
+• Dual LM2596 Bucks (5V / 4V)
+• 18650 Battery System (TP4056)</a:t>
+                      </a:r>
+                      <a:endParaRPr lang="en-IN" sz="1050" b="0" dirty="0">
+                        <a:solidFill>
+                          <a:srgbClr val="0A0A0A"/>
+                        </a:solidFill>
+                        <a:latin typeface="Times New Roman" panose="02020603050405020304" pitchFamily="18" charset="0"/>
+                      </a:endParaRPr>
+                    </a:p>
+                  </a:txBody>
+                  <a:tcPr>
+                    <a:solidFill>
+                      <a:srgbClr val="F0F0F0"/>
+                    </a:solidFill>
+                  </a:tcPr>
+                </a:tc>
+                <a:tc>
+                  <a:txBody>
+                    <a:bodyPr/>
+                    <a:lstStyle/>
+                    <a:p>
+                      <a:r>
+                        <a:rPr lang="en-IN" sz="1050" b="0" dirty="0">
+                          <a:solidFill>
+                            <a:srgbClr val="0A0A0A"/>
+                          </a:solidFill>
+                          <a:latin typeface="Times New Roman" panose="02020603050405020304" pitchFamily="18" charset="0"/>
+                        </a:rPr>
+                        <a:t>ESP32 fuses multi-sensor inputs in &lt;500ms. Raspberry Pi runs OpenCV + YOLOv8 vision AI for secondary confirmation over MQTT Serial bridge to prevent false alarms.</a:t>
+                      </a:r>
+                    </a:p>
+                  </a:txBody>
+                  <a:tcPr>
+                    <a:solidFill>
+                      <a:srgbClr val="F0F0F0"/>
+                    </a:solidFill>
+                  </a:tcPr>
+                </a:tc>
+                <a:extLst>
+                  <a:ext uri="{0D108BD9-81ED-4DB2-BD59-A6C34878D82A}">
+                    <a16:rowId xmlns:a16="http://schemas.microsoft.com/office/drawing/2014/main" val="3978210183"/>
+                  </a:ext>
+                </a:extLst>
+              </a:tr>
+              <a:tr h="1102382">
+                <a:tc>
+                  <a:txBody>
+                    <a:bodyPr/>
+                    <a:lstStyle/>
+                    <a:p>
+                      <a:r>
+                        <a:rPr lang="en-IN" sz="1050" b="1">
+                          <a:solidFill>
+                            <a:srgbClr val="0A0A0A"/>
+                          </a:solidFill>
+                          <a:latin typeface="Times New Roman" panose="02020603050405020304" pitchFamily="18" charset="0"/>
+                        </a:rPr>
+                        <a:t>Layer 3: RESPOND
+(Actuation &amp; Log)</a:t>
+                      </a:r>
+                    </a:p>
+                  </a:txBody>
+                  <a:tcPr>
+                    <a:solidFill>
+                      <a:srgbClr val="FFFFFF"/>
+                    </a:solidFill>
+                  </a:tcPr>
+                </a:tc>
+                <a:tc>
+                  <a:txBody>
+                    <a:bodyPr/>
+                    <a:lstStyle/>
+                    <a:p>
+                      <a:r>
+                        <a:rPr lang="en-US" sz="1050" b="0">
+                          <a:solidFill>
+                            <a:srgbClr val="0A0A0A"/>
+                          </a:solidFill>
+                          <a:latin typeface="Times New Roman" panose="02020603050405020304" pitchFamily="18" charset="0"/>
+                        </a:rPr>
+                        <a:t>• 2-Ch Relay Module (Active-LOW)
+• 12V Solenoid Door Lock
+• MicroSD Card Module (16GB)
+• 0.96 inch OLED Display (SSD1306)</a:t>
+                      </a:r>
+                      <a:endParaRPr lang="en-IN" sz="1050" b="0">
+                        <a:solidFill>
+                          <a:srgbClr val="0A0A0A"/>
+                        </a:solidFill>
+                        <a:latin typeface="Times New Roman" panose="02020603050405020304" pitchFamily="18" charset="0"/>
+                      </a:endParaRPr>
+                    </a:p>
+                  </a:txBody>
+                  <a:tcPr>
+                    <a:solidFill>
+                      <a:srgbClr val="FFFFFF"/>
+                    </a:solidFill>
+                  </a:tcPr>
+                </a:tc>
+                <a:tc>
+                  <a:txBody>
+                    <a:bodyPr/>
+                    <a:lstStyle/>
+                    <a:p>
+                      <a:r>
+                        <a:rPr lang="en-US" sz="1050" b="0">
+                          <a:solidFill>
+                            <a:srgbClr val="0A0A0A"/>
+                          </a:solidFill>
+                          <a:latin typeface="Times New Roman" panose="02020603050405020304" pitchFamily="18" charset="0"/>
+                        </a:rPr>
+                        <a:t>Relay triggers 12V solenoid lock within 3s upon threat confirmation to trap intruder. System status displayed on OLED HUD; events logged to FAT32 MicroSD.</a:t>
+                      </a:r>
+                      <a:endParaRPr lang="en-IN" sz="1050" b="0">
+                        <a:solidFill>
+                          <a:srgbClr val="0A0A0A"/>
+                        </a:solidFill>
+                        <a:latin typeface="Times New Roman" panose="02020603050405020304" pitchFamily="18" charset="0"/>
+                      </a:endParaRPr>
+                    </a:p>
+                  </a:txBody>
+                  <a:tcPr>
+                    <a:solidFill>
+                      <a:srgbClr val="FFFFFF"/>
+                    </a:solidFill>
+                  </a:tcPr>
+                </a:tc>
+                <a:extLst>
+                  <a:ext uri="{0D108BD9-81ED-4DB2-BD59-A6C34878D82A}">
+                    <a16:rowId xmlns:a16="http://schemas.microsoft.com/office/drawing/2014/main" val="4001823203"/>
+                  </a:ext>
+                </a:extLst>
+              </a:tr>
+              <a:tr h="1102382">
+                <a:tc>
+                  <a:txBody>
+                    <a:bodyPr/>
+                    <a:lstStyle/>
+                    <a:p>
+                      <a:r>
+                        <a:rPr lang="en-IN" sz="1050" b="1">
+                          <a:solidFill>
+                            <a:srgbClr val="0A0A0A"/>
+                          </a:solidFill>
+                          <a:latin typeface="Times New Roman" panose="02020603050405020304" pitchFamily="18" charset="0"/>
+                        </a:rPr>
+                        <a:t>Layer 4: ALERT
+(Multi-Layer SOS)</a:t>
+                      </a:r>
+                    </a:p>
+                  </a:txBody>
+                  <a:tcPr>
+                    <a:solidFill>
+                      <a:srgbClr val="F0F0F0"/>
+                    </a:solidFill>
+                  </a:tcPr>
+                </a:tc>
+                <a:tc>
+                  <a:txBody>
+                    <a:bodyPr/>
+                    <a:lstStyle/>
+                    <a:p>
+                      <a:r>
+                        <a:rPr lang="en-IN" sz="1050" b="0" dirty="0">
+                          <a:solidFill>
+                            <a:srgbClr val="0A0A0A"/>
+                          </a:solidFill>
+                          <a:latin typeface="Times New Roman" panose="02020603050405020304" pitchFamily="18" charset="0"/>
+                        </a:rPr>
+                        <a:t>• SIM800L GSM Module (+1000uF cap)
+• Onboard ESP32 Radios
+  (</a:t>
+                      </a:r>
+                      <a:r>
+                        <a:rPr lang="en-IN" sz="1050" b="0" dirty="0" err="1">
+                          <a:solidFill>
+                            <a:srgbClr val="0A0A0A"/>
+                          </a:solidFill>
+                          <a:latin typeface="Times New Roman" panose="02020603050405020304" pitchFamily="18" charset="0"/>
+                        </a:rPr>
+                        <a:t>WiFi</a:t>
+                      </a:r>
+                      <a:r>
+                        <a:rPr lang="en-IN" sz="1050" b="0" dirty="0">
+                          <a:solidFill>
+                            <a:srgbClr val="0A0A0A"/>
+                          </a:solidFill>
+                          <a:latin typeface="Times New Roman" panose="02020603050405020304" pitchFamily="18" charset="0"/>
+                        </a:rPr>
+                        <a:t> Beacon + BLE + ESP-NOW)</a:t>
+                      </a:r>
+                    </a:p>
+                  </a:txBody>
+                  <a:tcPr>
+                    <a:solidFill>
+                      <a:srgbClr val="F0F0F0"/>
+                    </a:solidFill>
+                  </a:tcPr>
+                </a:tc>
+                <a:tc>
+                  <a:txBody>
+                    <a:bodyPr/>
+                    <a:lstStyle/>
+                    <a:p>
+                      <a:r>
+                        <a:rPr lang="en-IN" sz="1050" b="0" dirty="0">
+                          <a:solidFill>
+                            <a:srgbClr val="0A0A0A"/>
+                          </a:solidFill>
+                          <a:latin typeface="Times New Roman" panose="02020603050405020304" pitchFamily="18" charset="0"/>
+                        </a:rPr>
+                        <a:t>Sends GSM SMS alerts to owner &amp; police via SIM800L. Simultaneously broadcasts </a:t>
+                      </a:r>
+                      <a:r>
+                        <a:rPr lang="en-IN" sz="1050" b="0" dirty="0" err="1">
+                          <a:solidFill>
+                            <a:srgbClr val="0A0A0A"/>
+                          </a:solidFill>
+                          <a:latin typeface="Times New Roman" panose="02020603050405020304" pitchFamily="18" charset="0"/>
+                        </a:rPr>
+                        <a:t>WiFi</a:t>
+                      </a:r>
+                      <a:r>
+                        <a:rPr lang="en-IN" sz="1050" b="0" dirty="0">
+                          <a:solidFill>
+                            <a:srgbClr val="0A0A0A"/>
+                          </a:solidFill>
+                          <a:latin typeface="Times New Roman" panose="02020603050405020304" pitchFamily="18" charset="0"/>
+                        </a:rPr>
+                        <a:t> Beacon SSID (30m), BLE Eddystone (15m), and ESP-NOW Mesh Relay (200m+). Zero internet required.</a:t>
+                      </a:r>
+                    </a:p>
+                  </a:txBody>
+                  <a:tcPr>
+                    <a:solidFill>
+                      <a:srgbClr val="F0F0F0"/>
+                    </a:solidFill>
+                  </a:tcPr>
+                </a:tc>
+                <a:extLst>
+                  <a:ext uri="{0D108BD9-81ED-4DB2-BD59-A6C34878D82A}">
+                    <a16:rowId xmlns:a16="http://schemas.microsoft.com/office/drawing/2014/main" val="2112548265"/>
+                  </a:ext>
+                </a:extLst>
+              </a:tr>
+            </a:tbl>
+          </a:graphicData>
+        </a:graphic>
+      </p:graphicFrame>
+    </p:spTree>
+  </p:cSld>
+  <p:clrMapOvr>
+    <a:masterClrMapping/>
+  </p:clrMapOvr>
+</p:sld>
+</file>
+
+<file path=ppt/slides/slide11.xml><?xml version="1.0" encoding="utf-8"?>
+<p:sld xmlns:a="http://schemas.openxmlformats.org/drawingml/2006/main" xmlns:r="http://schemas.openxmlformats.org/officeDocument/2006/relationships" xmlns:p="http://schemas.openxmlformats.org/presentationml/2006/main">
+  <p:cSld>
+    <p:spTree>
+      <p:nvGrpSpPr>
+        <p:cNvPr id="1" name=""/>
+        <p:cNvGrpSpPr/>
+        <p:nvPr/>
+      </p:nvGrpSpPr>
+      <p:grpSpPr>
+        <a:xfrm>
+          <a:off x="0" y="0"/>
+          <a:ext cx="0" cy="0"/>
+          <a:chOff x="0" y="0"/>
+          <a:chExt cx="0" cy="0"/>
+        </a:xfrm>
+      </p:grpSpPr>
+      <p:sp>
+        <p:nvSpPr>
           <p:cNvPr id="2" name="Title 1">
             <a:extLst>
               <a:ext uri="{FF2B5EF4-FFF2-40B4-BE49-F238E27FC236}">
@@ -5616,7 +6200,7 @@
 </p:sld>
 </file>
 
-<file path=ppt/slides/slide11.xml><?xml version="1.0" encoding="utf-8"?>
+<file path=ppt/slides/slide12.xml><?xml version="1.0" encoding="utf-8"?>
 <p:sld xmlns:a="http://schemas.openxmlformats.org/drawingml/2006/main" xmlns:r="http://schemas.openxmlformats.org/officeDocument/2006/relationships" xmlns:p="http://schemas.openxmlformats.org/presentationml/2006/main">
   <p:cSld>
     <p:spTree>
@@ -5776,7 +6360,7 @@
 </p:sld>
 </file>
 
-<file path=ppt/slides/slide12.xml><?xml version="1.0" encoding="utf-8"?>
+<file path=ppt/slides/slide13.xml><?xml version="1.0" encoding="utf-8"?>
 <p:sld xmlns:a="http://schemas.openxmlformats.org/drawingml/2006/main" xmlns:r="http://schemas.openxmlformats.org/officeDocument/2006/relationships" xmlns:p="http://schemas.openxmlformats.org/presentationml/2006/main">
   <p:cSld>
     <p:spTree>
@@ -8426,7 +9010,7 @@
 </p:sld>
 </file>
 
-<file path=ppt/slides/slide13.xml><?xml version="1.0" encoding="utf-8"?>
+<file path=ppt/slides/slide14.xml><?xml version="1.0" encoding="utf-8"?>
 <p:sld xmlns:a="http://schemas.openxmlformats.org/drawingml/2006/main" xmlns:r="http://schemas.openxmlformats.org/officeDocument/2006/relationships" xmlns:p="http://schemas.openxmlformats.org/presentationml/2006/main">
   <p:cSld>
     <p:spTree>
@@ -8788,1287 +9372,6 @@
         <p14:creationId xmlns:p14="http://schemas.microsoft.com/office/powerpoint/2010/main" val="2679642638"/>
       </p:ext>
     </p:extLst>
-  </p:cSld>
-  <p:clrMapOvr>
-    <a:masterClrMapping/>
-  </p:clrMapOvr>
-</p:sld>
-</file>
-
-<file path=ppt/slides/slide14.xml><?xml version="1.0" encoding="utf-8"?>
-<p:sld xmlns:a="http://schemas.openxmlformats.org/drawingml/2006/main" xmlns:p="http://schemas.openxmlformats.org/presentationml/2006/main" xmlns:r="http://schemas.openxmlformats.org/officeDocument/2006/relationships">
-  <p:cSld>
-    <p:spTree>
-      <p:nvGrpSpPr>
-        <p:cNvPr id="1" name=""/>
-        <p:cNvGrpSpPr/>
-        <p:nvPr/>
-      </p:nvGrpSpPr>
-      <p:grpSpPr/>
-      <p:sp>
-        <p:nvSpPr>
-          <p:cNvPr id="2" name="TextBox 1"/>
-          <p:cNvSpPr txBox="1"/>
-          <p:nvPr/>
-        </p:nvSpPr>
-        <p:spPr>
-          <a:xfrm>
-            <a:off x="323528" y="267574"/>
-            <a:ext cx="8568952" cy="895832"/>
-          </a:xfrm>
-          <a:prstGeom prst="rect">
-            <a:avLst/>
-          </a:prstGeom>
-          <a:noFill/>
-        </p:spPr>
-        <p:txBody>
-          <a:bodyPr wrap="square">
-            <a:spAutoFit/>
-          </a:bodyPr>
-          <a:lstStyle/>
-          <a:p>
-            <a:pPr algn="l">
-              <a:defRPr sz="2800" b="1">
-                <a:solidFill>
-                  <a:srgbClr val="000000"/>
-                </a:solidFill>
-              </a:defRPr>
-            </a:pPr>
-            <a:r>
-              <a:t>Literature Survey (Continued)</a:t>
-            </a:r>
-          </a:p>
-        </p:txBody>
-      </p:sp>
-      <p:graphicFrame>
-        <p:nvGraphicFramePr>
-          <p:cNvPr id="3" name="Table 2"/>
-          <p:cNvGraphicFramePr>
-            <a:graphicFrameLocks noGrp="1"/>
-          </p:cNvGraphicFramePr>
-          <p:nvPr/>
-        </p:nvGraphicFramePr>
-        <p:xfrm>
-          <a:off x="323528" y="1196752"/>
-          <a:ext cx="8568952" cy="5200000"/>
-        </p:xfrm>
-        <a:graphic>
-          <a:graphicData uri="http://schemas.openxmlformats.org/drawingml/2006/table">
-            <a:tbl>
-              <a:tblPr firstRow="1" bandRow="1">
-                <a:tableStyleId>{5C22544A-7EE6-4342-B048-85BDC9FD1C3A}</a:tableStyleId>
-              </a:tblPr>
-              <a:tblGrid>
-                <a:gridCol w="450000"/>
-                <a:gridCol w="2800000"/>
-                <a:gridCol w="1600000"/>
-                <a:gridCol w="2000000"/>
-                <a:gridCol w="1718952"/>
-              </a:tblGrid>
-              <a:tr h="472727">
-                <a:tc>
-                  <a:txBody>
-                    <a:bodyPr/>
-                    <a:lstStyle/>
-                    <a:p>
-                      <a:pPr algn="ctr">
-                        <a:defRPr sz="800" b="1">
-                          <a:solidFill>
-                            <a:srgbClr val="FFFFFF"/>
-                          </a:solidFill>
-                        </a:defRPr>
-                      </a:pPr>
-                      <a:r>
-                        <a:t>Sl.</a:t>
-                      </a:r>
-                    </a:p>
-                    <a:p>
-                      <a:pPr algn="ctr">
-                        <a:defRPr sz="800" b="1">
-                          <a:solidFill>
-                            <a:srgbClr val="FFFFFF"/>
-                          </a:solidFill>
-                        </a:defRPr>
-                      </a:pPr>
-                      <a:r>
-                        <a:t>No</a:t>
-                      </a:r>
-                    </a:p>
-                  </a:txBody>
-                  <a:tcPr>
-                    <a:solidFill>
-                      <a:srgbClr val="111111"/>
-                    </a:solidFill>
-                  </a:tcPr>
-                </a:tc>
-                <a:tc>
-                  <a:txBody>
-                    <a:bodyPr/>
-                    <a:lstStyle/>
-                    <a:p>
-                      <a:pPr algn="ctr">
-                        <a:defRPr sz="800" b="1">
-                          <a:solidFill>
-                            <a:srgbClr val="FFFFFF"/>
-                          </a:solidFill>
-                        </a:defRPr>
-                      </a:pPr>
-                      <a:r>
-                        <a:t>Author &amp; Paper Title</a:t>
-                      </a:r>
-                    </a:p>
-                  </a:txBody>
-                  <a:tcPr>
-                    <a:solidFill>
-                      <a:srgbClr val="111111"/>
-                    </a:solidFill>
-                  </a:tcPr>
-                </a:tc>
-                <a:tc>
-                  <a:txBody>
-                    <a:bodyPr/>
-                    <a:lstStyle/>
-                    <a:p>
-                      <a:pPr algn="ctr">
-                        <a:defRPr sz="800" b="1">
-                          <a:solidFill>
-                            <a:srgbClr val="FFFFFF"/>
-                          </a:solidFill>
-                        </a:defRPr>
-                      </a:pPr>
-                      <a:r>
-                        <a:t>Methodology</a:t>
-                      </a:r>
-                    </a:p>
-                  </a:txBody>
-                  <a:tcPr>
-                    <a:solidFill>
-                      <a:srgbClr val="111111"/>
-                    </a:solidFill>
-                  </a:tcPr>
-                </a:tc>
-                <a:tc>
-                  <a:txBody>
-                    <a:bodyPr/>
-                    <a:lstStyle/>
-                    <a:p>
-                      <a:pPr algn="ctr">
-                        <a:defRPr sz="800" b="1">
-                          <a:solidFill>
-                            <a:srgbClr val="FFFFFF"/>
-                          </a:solidFill>
-                        </a:defRPr>
-                      </a:pPr>
-                      <a:r>
-                        <a:t>Learning / Finding</a:t>
-                      </a:r>
-                    </a:p>
-                  </a:txBody>
-                  <a:tcPr>
-                    <a:solidFill>
-                      <a:srgbClr val="111111"/>
-                    </a:solidFill>
-                  </a:tcPr>
-                </a:tc>
-                <a:tc>
-                  <a:txBody>
-                    <a:bodyPr/>
-                    <a:lstStyle/>
-                    <a:p>
-                      <a:pPr algn="ctr">
-                        <a:defRPr sz="800" b="1">
-                          <a:solidFill>
-                            <a:srgbClr val="FFFFFF"/>
-                          </a:solidFill>
-                        </a:defRPr>
-                      </a:pPr>
-                      <a:r>
-                        <a:t>Future Enhancement</a:t>
-                      </a:r>
-                    </a:p>
-                  </a:txBody>
-                  <a:tcPr>
-                    <a:solidFill>
-                      <a:srgbClr val="111111"/>
-                    </a:solidFill>
-                  </a:tcPr>
-                </a:tc>
-              </a:tr>
-              <a:tr h="472727">
-                <a:tc>
-                  <a:txBody>
-                    <a:bodyPr/>
-                    <a:lstStyle/>
-                    <a:p>
-                      <a:pPr algn="ctr">
-                        <a:defRPr sz="800" b="1">
-                          <a:solidFill>
-                            <a:srgbClr val="222222"/>
-                          </a:solidFill>
-                        </a:defRPr>
-                      </a:pPr>
-                      <a:r>
-                        <a:t>16</a:t>
-                      </a:r>
-                    </a:p>
-                  </a:txBody>
-                  <a:tcPr>
-                    <a:solidFill>
-                      <a:srgbClr val="F9F9F9"/>
-                    </a:solidFill>
-                  </a:tcPr>
-                </a:tc>
-                <a:tc>
-                  <a:txBody>
-                    <a:bodyPr/>
-                    <a:lstStyle/>
-                    <a:p>
-                      <a:pPr>
-                        <a:defRPr sz="650" b="0">
-                          <a:solidFill>
-                            <a:srgbClr val="222222"/>
-                          </a:solidFill>
-                        </a:defRPr>
-                      </a:pPr>
-                      <a:r>
-                        <a:t>Li et al., IEEE Trans. Ind. Informatics, 2025 — 'Systematic Vital Signs Detection via FMCW MIMO Radar'</a:t>
-                      </a:r>
-                    </a:p>
-                  </a:txBody>
-                  <a:tcPr>
-                    <a:solidFill>
-                      <a:srgbClr val="F9F9F9"/>
-                    </a:solidFill>
-                  </a:tcPr>
-                </a:tc>
-                <a:tc>
-                  <a:txBody>
-                    <a:bodyPr/>
-                    <a:lstStyle/>
-                    <a:p>
-                      <a:pPr>
-                        <a:defRPr sz="700">
-                          <a:solidFill>
-                            <a:srgbClr val="222222"/>
-                          </a:solidFill>
-                        </a:defRPr>
-                      </a:pPr>
-                      <a:r>
-                        <a:t>FMCW MIMO radar with maximum ratio combining &amp; FastICA for breathing/heartbeat</a:t>
-                      </a:r>
-                    </a:p>
-                  </a:txBody>
-                  <a:tcPr>
-                    <a:solidFill>
-                      <a:srgbClr val="F9F9F9"/>
-                    </a:solidFill>
-                  </a:tcPr>
-                </a:tc>
-                <a:tc>
-                  <a:txBody>
-                    <a:bodyPr/>
-                    <a:lstStyle/>
-                    <a:p>
-                      <a:pPr>
-                        <a:defRPr sz="700">
-                          <a:solidFill>
-                            <a:srgbClr val="222222"/>
-                          </a:solidFill>
-                        </a:defRPr>
-                      </a:pPr>
-                      <a:r>
-                        <a:t>Validates TRAPNET's LD2410C FMCW micro-Doppler approach for detecting stationary humans</a:t>
-                      </a:r>
-                    </a:p>
-                  </a:txBody>
-                  <a:tcPr>
-                    <a:solidFill>
-                      <a:srgbClr val="F9F9F9"/>
-                    </a:solidFill>
-                  </a:tcPr>
-                </a:tc>
-                <a:tc>
-                  <a:txBody>
-                    <a:bodyPr/>
-                    <a:lstStyle/>
-                    <a:p>
-                      <a:pPr>
-                        <a:defRPr sz="700">
-                          <a:solidFill>
-                            <a:srgbClr val="222222"/>
-                          </a:solidFill>
-                        </a:defRPr>
-                      </a:pPr>
-                      <a:r>
-                        <a:t>No intrusion response, no door locking, no SOS integration</a:t>
-                      </a:r>
-                    </a:p>
-                  </a:txBody>
-                  <a:tcPr>
-                    <a:solidFill>
-                      <a:srgbClr val="F9F9F9"/>
-                    </a:solidFill>
-                  </a:tcPr>
-                </a:tc>
-              </a:tr>
-              <a:tr h="472727">
-                <a:tc>
-                  <a:txBody>
-                    <a:bodyPr/>
-                    <a:lstStyle/>
-                    <a:p>
-                      <a:pPr algn="ctr">
-                        <a:defRPr sz="800" b="1">
-                          <a:solidFill>
-                            <a:srgbClr val="222222"/>
-                          </a:solidFill>
-                        </a:defRPr>
-                      </a:pPr>
-                      <a:r>
-                        <a:t>17</a:t>
-                      </a:r>
-                    </a:p>
-                  </a:txBody>
-                  <a:tcPr/>
-                </a:tc>
-                <a:tc>
-                  <a:txBody>
-                    <a:bodyPr/>
-                    <a:lstStyle/>
-                    <a:p>
-                      <a:pPr>
-                        <a:defRPr sz="650" b="0">
-                          <a:solidFill>
-                            <a:srgbClr val="222222"/>
-                          </a:solidFill>
-                        </a:defRPr>
-                      </a:pPr>
-                      <a:r>
-                        <a:t>Chen et al., IEEE Sensors Journal, 2025 — 'Contactless Vital Sign Monitoring on Edge Devices with T-CNN and mmWave'</a:t>
-                      </a:r>
-                    </a:p>
-                  </a:txBody>
-                  <a:tcPr/>
-                </a:tc>
-                <a:tc>
-                  <a:txBody>
-                    <a:bodyPr/>
-                    <a:lstStyle/>
-                    <a:p>
-                      <a:pPr>
-                        <a:defRPr sz="700">
-                          <a:solidFill>
-                            <a:srgbClr val="222222"/>
-                          </a:solidFill>
-                        </a:defRPr>
-                      </a:pPr>
-                      <a:r>
-                        <a:t>Low-complexity T-CNN on edge devices for breath/heart rate extraction from FMCW radar</a:t>
-                      </a:r>
-                    </a:p>
-                  </a:txBody>
-                  <a:tcPr/>
-                </a:tc>
-                <a:tc>
-                  <a:txBody>
-                    <a:bodyPr/>
-                    <a:lstStyle/>
-                    <a:p>
-                      <a:pPr>
-                        <a:defRPr sz="700">
-                          <a:solidFill>
-                            <a:srgbClr val="222222"/>
-                          </a:solidFill>
-                        </a:defRPr>
-                      </a:pPr>
-                      <a:r>
-                        <a:t>Validates edge deployment of radar processing on resource-constrained devices like ESP32-S3</a:t>
-                      </a:r>
-                    </a:p>
-                  </a:txBody>
-                  <a:tcPr/>
-                </a:tc>
-                <a:tc>
-                  <a:txBody>
-                    <a:bodyPr/>
-                    <a:lstStyle/>
-                    <a:p>
-                      <a:pPr>
-                        <a:defRPr sz="700">
-                          <a:solidFill>
-                            <a:srgbClr val="222222"/>
-                          </a:solidFill>
-                        </a:defRPr>
-                      </a:pPr>
-                      <a:r>
-                        <a:t>Health monitoring only — no security context, no multi-sensor fusion</a:t>
-                      </a:r>
-                    </a:p>
-                  </a:txBody>
-                  <a:tcPr/>
-                </a:tc>
-              </a:tr>
-              <a:tr h="472727">
-                <a:tc>
-                  <a:txBody>
-                    <a:bodyPr/>
-                    <a:lstStyle/>
-                    <a:p>
-                      <a:pPr algn="ctr">
-                        <a:defRPr sz="800" b="1">
-                          <a:solidFill>
-                            <a:srgbClr val="222222"/>
-                          </a:solidFill>
-                        </a:defRPr>
-                      </a:pPr>
-                      <a:r>
-                        <a:t>18</a:t>
-                      </a:r>
-                    </a:p>
-                  </a:txBody>
-                  <a:tcPr>
-                    <a:solidFill>
-                      <a:srgbClr val="F9F9F9"/>
-                    </a:solidFill>
-                  </a:tcPr>
-                </a:tc>
-                <a:tc>
-                  <a:txBody>
-                    <a:bodyPr/>
-                    <a:lstStyle/>
-                    <a:p>
-                      <a:pPr>
-                        <a:defRPr sz="650" b="0">
-                          <a:solidFill>
-                            <a:srgbClr val="222222"/>
-                          </a:solidFill>
-                        </a:defRPr>
-                      </a:pPr>
-                      <a:r>
-                        <a:t>Russo et al., IEEE Access, 2025 — 'Contactless Monitoring Using Multiple FMCW Radars in 24 GHz Band'</a:t>
-                      </a:r>
-                    </a:p>
-                  </a:txBody>
-                  <a:tcPr>
-                    <a:solidFill>
-                      <a:srgbClr val="F9F9F9"/>
-                    </a:solidFill>
-                  </a:tcPr>
-                </a:tc>
-                <a:tc>
-                  <a:txBody>
-                    <a:bodyPr/>
-                    <a:lstStyle/>
-                    <a:p>
-                      <a:pPr>
-                        <a:defRPr sz="700">
-                          <a:solidFill>
-                            <a:srgbClr val="222222"/>
-                          </a:solidFill>
-                        </a:defRPr>
-                      </a:pPr>
-                      <a:r>
-                        <a:t>24GHz FMCW radar with Bayesian filtering for real-time vital sign estimation</a:t>
-                      </a:r>
-                    </a:p>
-                  </a:txBody>
-                  <a:tcPr>
-                    <a:solidFill>
-                      <a:srgbClr val="F9F9F9"/>
-                    </a:solidFill>
-                  </a:tcPr>
-                </a:tc>
-                <a:tc>
-                  <a:txBody>
-                    <a:bodyPr/>
-                    <a:lstStyle/>
-                    <a:p>
-                      <a:pPr>
-                        <a:defRPr sz="700">
-                          <a:solidFill>
-                            <a:srgbClr val="222222"/>
-                          </a:solidFill>
-                        </a:defRPr>
-                      </a:pPr>
-                      <a:r>
-                        <a:t>Same 24GHz band as TRAPNET's LD2410C; real-time breathing detection validated</a:t>
-                      </a:r>
-                    </a:p>
-                  </a:txBody>
-                  <a:tcPr>
-                    <a:solidFill>
-                      <a:srgbClr val="F9F9F9"/>
-                    </a:solidFill>
-                  </a:tcPr>
-                </a:tc>
-                <a:tc>
-                  <a:txBody>
-                    <a:bodyPr/>
-                    <a:lstStyle/>
-                    <a:p>
-                      <a:pPr>
-                        <a:defRPr sz="700">
-                          <a:solidFill>
-                            <a:srgbClr val="222222"/>
-                          </a:solidFill>
-                        </a:defRPr>
-                      </a:pPr>
-                      <a:r>
-                        <a:t>No intruder detection logic, no embedded security system</a:t>
-                      </a:r>
-                    </a:p>
-                  </a:txBody>
-                  <a:tcPr>
-                    <a:solidFill>
-                      <a:srgbClr val="F9F9F9"/>
-                    </a:solidFill>
-                  </a:tcPr>
-                </a:tc>
-              </a:tr>
-              <a:tr h="472727">
-                <a:tc>
-                  <a:txBody>
-                    <a:bodyPr/>
-                    <a:lstStyle/>
-                    <a:p>
-                      <a:pPr algn="ctr">
-                        <a:defRPr sz="800" b="1">
-                          <a:solidFill>
-                            <a:srgbClr val="222222"/>
-                          </a:solidFill>
-                        </a:defRPr>
-                      </a:pPr>
-                      <a:r>
-                        <a:t>19</a:t>
-                      </a:r>
-                    </a:p>
-                  </a:txBody>
-                  <a:tcPr/>
-                </a:tc>
-                <a:tc>
-                  <a:txBody>
-                    <a:bodyPr/>
-                    <a:lstStyle/>
-                    <a:p>
-                      <a:pPr>
-                        <a:defRPr sz="650" b="0">
-                          <a:solidFill>
-                            <a:srgbClr val="222222"/>
-                          </a:solidFill>
-                        </a:defRPr>
-                      </a:pPr>
-                      <a:r>
-                        <a:t>Rahman et al., IEEE ICDEC, 2025 — 'IoT-Enabled Smart Door Lock with RFID, OTP and Intrusion Detection'</a:t>
-                      </a:r>
-                    </a:p>
-                  </a:txBody>
-                  <a:tcPr/>
-                </a:tc>
-                <a:tc>
-                  <a:txBody>
-                    <a:bodyPr/>
-                    <a:lstStyle/>
-                    <a:p>
-                      <a:pPr>
-                        <a:defRPr sz="700">
-                          <a:solidFill>
-                            <a:srgbClr val="222222"/>
-                          </a:solidFill>
-                        </a:defRPr>
-                      </a:pPr>
-                      <a:r>
-                        <a:t>ESP32 + RFID + OTP + relay-controlled solenoid lock for smart door security</a:t>
-                      </a:r>
-                    </a:p>
-                  </a:txBody>
-                  <a:tcPr/>
-                </a:tc>
-                <a:tc>
-                  <a:txBody>
-                    <a:bodyPr/>
-                    <a:lstStyle/>
-                    <a:p>
-                      <a:pPr>
-                        <a:defRPr sz="700">
-                          <a:solidFill>
-                            <a:srgbClr val="222222"/>
-                          </a:solidFill>
-                        </a:defRPr>
-                      </a:pPr>
-                      <a:r>
-                        <a:t>Same problem — auto door lock on intrusion; validates relay+solenoid approach</a:t>
-                      </a:r>
-                    </a:p>
-                  </a:txBody>
-                  <a:tcPr/>
-                </a:tc>
-                <a:tc>
-                  <a:txBody>
-                    <a:bodyPr/>
-                    <a:lstStyle/>
-                    <a:p>
-                      <a:pPr>
-                        <a:defRPr sz="700">
-                          <a:solidFill>
-                            <a:srgbClr val="222222"/>
-                          </a:solidFill>
-                        </a:defRPr>
-                      </a:pPr>
-                      <a:r>
-                        <a:t>PIR only (no radar), no multi-channel SOS, no AI visual confirmation</a:t>
-                      </a:r>
-                    </a:p>
-                  </a:txBody>
-                  <a:tcPr/>
-                </a:tc>
-              </a:tr>
-              <a:tr h="472727">
-                <a:tc>
-                  <a:txBody>
-                    <a:bodyPr/>
-                    <a:lstStyle/>
-                    <a:p>
-                      <a:pPr algn="ctr">
-                        <a:defRPr sz="800" b="1">
-                          <a:solidFill>
-                            <a:srgbClr val="222222"/>
-                          </a:solidFill>
-                        </a:defRPr>
-                      </a:pPr>
-                      <a:r>
-                        <a:t>20</a:t>
-                      </a:r>
-                    </a:p>
-                  </a:txBody>
-                  <a:tcPr>
-                    <a:solidFill>
-                      <a:srgbClr val="F9F9F9"/>
-                    </a:solidFill>
-                  </a:tcPr>
-                </a:tc>
-                <a:tc>
-                  <a:txBody>
-                    <a:bodyPr/>
-                    <a:lstStyle/>
-                    <a:p>
-                      <a:pPr>
-                        <a:defRPr sz="650" b="0">
-                          <a:solidFill>
-                            <a:srgbClr val="222222"/>
-                          </a:solidFill>
-                        </a:defRPr>
-                      </a:pPr>
-                      <a:r>
-                        <a:t>Ferrag et al., IEEE IoT Journal, 2025 — 'Edge-IIoTset: Comprehensive IoT Cyber Security Dataset'</a:t>
-                      </a:r>
-                    </a:p>
-                  </a:txBody>
-                  <a:tcPr>
-                    <a:solidFill>
-                      <a:srgbClr val="F9F9F9"/>
-                    </a:solidFill>
-                  </a:tcPr>
-                </a:tc>
-                <a:tc>
-                  <a:txBody>
-                    <a:bodyPr/>
-                    <a:lstStyle/>
-                    <a:p>
-                      <a:pPr>
-                        <a:defRPr sz="700">
-                          <a:solidFill>
-                            <a:srgbClr val="222222"/>
-                          </a:solidFill>
-                        </a:defRPr>
-                      </a:pPr>
-                      <a:r>
-                        <a:t>Edge-based federated learning for IoT intrusion detection at edge nodes</a:t>
-                      </a:r>
-                    </a:p>
-                  </a:txBody>
-                  <a:tcPr>
-                    <a:solidFill>
-                      <a:srgbClr val="F9F9F9"/>
-                    </a:solidFill>
-                  </a:tcPr>
-                </a:tc>
-                <a:tc>
-                  <a:txBody>
-                    <a:bodyPr/>
-                    <a:lstStyle/>
-                    <a:p>
-                      <a:pPr>
-                        <a:defRPr sz="700">
-                          <a:solidFill>
-                            <a:srgbClr val="222222"/>
-                          </a:solidFill>
-                        </a:defRPr>
-                      </a:pPr>
-                      <a:r>
-                        <a:t>Validates TRAPNET's edge-computing approach with ESP32 + RPi Zero 2W</a:t>
-                      </a:r>
-                    </a:p>
-                  </a:txBody>
-                  <a:tcPr>
-                    <a:solidFill>
-                      <a:srgbClr val="F9F9F9"/>
-                    </a:solidFill>
-                  </a:tcPr>
-                </a:tc>
-                <a:tc>
-                  <a:txBody>
-                    <a:bodyPr/>
-                    <a:lstStyle/>
-                    <a:p>
-                      <a:pPr>
-                        <a:defRPr sz="700">
-                          <a:solidFill>
-                            <a:srgbClr val="222222"/>
-                          </a:solidFill>
-                        </a:defRPr>
-                      </a:pPr>
-                      <a:r>
-                        <a:t>Cyber intrusion — not physical intrusion; no sensor hardware</a:t>
-                      </a:r>
-                    </a:p>
-                  </a:txBody>
-                  <a:tcPr>
-                    <a:solidFill>
-                      <a:srgbClr val="F9F9F9"/>
-                    </a:solidFill>
-                  </a:tcPr>
-                </a:tc>
-              </a:tr>
-              <a:tr h="472727">
-                <a:tc>
-                  <a:txBody>
-                    <a:bodyPr/>
-                    <a:lstStyle/>
-                    <a:p>
-                      <a:pPr algn="ctr">
-                        <a:defRPr sz="800" b="1">
-                          <a:solidFill>
-                            <a:srgbClr val="222222"/>
-                          </a:solidFill>
-                        </a:defRPr>
-                      </a:pPr>
-                      <a:r>
-                        <a:t>21</a:t>
-                      </a:r>
-                    </a:p>
-                  </a:txBody>
-                  <a:tcPr/>
-                </a:tc>
-                <a:tc>
-                  <a:txBody>
-                    <a:bodyPr/>
-                    <a:lstStyle/>
-                    <a:p>
-                      <a:pPr>
-                        <a:defRPr sz="650" b="0">
-                          <a:solidFill>
-                            <a:srgbClr val="222222"/>
-                          </a:solidFill>
-                        </a:defRPr>
-                      </a:pPr>
-                      <a:r>
-                        <a:t>Akram et al., IEEE Trans. Consumer Elec., 2024 — 'Secure IoT Smart Home Using Sensor Fusion'</a:t>
-                      </a:r>
-                    </a:p>
-                  </a:txBody>
-                  <a:tcPr/>
-                </a:tc>
-                <a:tc>
-                  <a:txBody>
-                    <a:bodyPr/>
-                    <a:lstStyle/>
-                    <a:p>
-                      <a:pPr>
-                        <a:defRPr sz="700">
-                          <a:solidFill>
-                            <a:srgbClr val="222222"/>
-                          </a:solidFill>
-                        </a:defRPr>
-                      </a:pPr>
-                      <a:r>
-                        <a:t>Multi-sensor fusion (PIR + ultrasonic + camera) for false-alarm reduction</a:t>
-                      </a:r>
-                    </a:p>
-                  </a:txBody>
-                  <a:tcPr/>
-                </a:tc>
-                <a:tc>
-                  <a:txBody>
-                    <a:bodyPr/>
-                    <a:lstStyle/>
-                    <a:p>
-                      <a:pPr>
-                        <a:defRPr sz="700">
-                          <a:solidFill>
-                            <a:srgbClr val="222222"/>
-                          </a:solidFill>
-                        </a:defRPr>
-                      </a:pPr>
-                      <a:r>
-                        <a:t>Core concept overlap — multi-sensor fusion reduces false positives significantly</a:t>
-                      </a:r>
-                    </a:p>
-                  </a:txBody>
-                  <a:tcPr/>
-                </a:tc>
-                <a:tc>
-                  <a:txBody>
-                    <a:bodyPr/>
-                    <a:lstStyle/>
-                    <a:p>
-                      <a:pPr>
-                        <a:defRPr sz="700">
-                          <a:solidFill>
-                            <a:srgbClr val="222222"/>
-                          </a:solidFill>
-                        </a:defRPr>
-                      </a:pPr>
-                      <a:r>
-                        <a:t>No mmWave radar, no trapping, no multi-channel offline SOS</a:t>
-                      </a:r>
-                    </a:p>
-                  </a:txBody>
-                  <a:tcPr/>
-                </a:tc>
-              </a:tr>
-              <a:tr h="472727">
-                <a:tc>
-                  <a:txBody>
-                    <a:bodyPr/>
-                    <a:lstStyle/>
-                    <a:p>
-                      <a:pPr algn="ctr">
-                        <a:defRPr sz="800" b="1">
-                          <a:solidFill>
-                            <a:srgbClr val="222222"/>
-                          </a:solidFill>
-                        </a:defRPr>
-                      </a:pPr>
-                      <a:r>
-                        <a:t>22</a:t>
-                      </a:r>
-                    </a:p>
-                  </a:txBody>
-                  <a:tcPr>
-                    <a:solidFill>
-                      <a:srgbClr val="F9F9F9"/>
-                    </a:solidFill>
-                  </a:tcPr>
-                </a:tc>
-                <a:tc>
-                  <a:txBody>
-                    <a:bodyPr/>
-                    <a:lstStyle/>
-                    <a:p>
-                      <a:pPr>
-                        <a:defRPr sz="650" b="0">
-                          <a:solidFill>
-                            <a:srgbClr val="222222"/>
-                          </a:solidFill>
-                        </a:defRPr>
-                      </a:pPr>
-                      <a:r>
-                        <a:t>Park et al., IEEE ICIT, 2024 — 'MeshSOS: ESP-NOW Based P2P Emergency Alert Relay System'</a:t>
-                      </a:r>
-                    </a:p>
-                  </a:txBody>
-                  <a:tcPr>
-                    <a:solidFill>
-                      <a:srgbClr val="F9F9F9"/>
-                    </a:solidFill>
-                  </a:tcPr>
-                </a:tc>
-                <a:tc>
-                  <a:txBody>
-                    <a:bodyPr/>
-                    <a:lstStyle/>
-                    <a:p>
-                      <a:pPr>
-                        <a:defRPr sz="700">
-                          <a:solidFill>
-                            <a:srgbClr val="222222"/>
-                          </a:solidFill>
-                        </a:defRPr>
-                      </a:pPr>
-                      <a:r>
-                        <a:t>ESP32 ESP-NOW peer-to-peer multi-hop relay for infrastructure-free emergency alerts</a:t>
-                      </a:r>
-                    </a:p>
-                  </a:txBody>
-                  <a:tcPr>
-                    <a:solidFill>
-                      <a:srgbClr val="F9F9F9"/>
-                    </a:solidFill>
-                  </a:tcPr>
-                </a:tc>
-                <a:tc>
-                  <a:txBody>
-                    <a:bodyPr/>
-                    <a:lstStyle/>
-                    <a:p>
-                      <a:pPr>
-                        <a:defRPr sz="700">
-                          <a:solidFill>
-                            <a:srgbClr val="222222"/>
-                          </a:solidFill>
-                        </a:defRPr>
-                      </a:pPr>
-                      <a:r>
-                        <a:t>Directly validates TRAPNET's ESP-NOW mesh relay SOS concept</a:t>
-                      </a:r>
-                    </a:p>
-                  </a:txBody>
-                  <a:tcPr>
-                    <a:solidFill>
-                      <a:srgbClr val="F9F9F9"/>
-                    </a:solidFill>
-                  </a:tcPr>
-                </a:tc>
-                <a:tc>
-                  <a:txBody>
-                    <a:bodyPr/>
-                    <a:lstStyle/>
-                    <a:p>
-                      <a:pPr>
-                        <a:defRPr sz="700">
-                          <a:solidFill>
-                            <a:srgbClr val="222222"/>
-                          </a:solidFill>
-                        </a:defRPr>
-                      </a:pPr>
-                      <a:r>
-                        <a:t>Worker safety (fall detection) — no intrusion detection, no door locking</a:t>
-                      </a:r>
-                    </a:p>
-                  </a:txBody>
-                  <a:tcPr>
-                    <a:solidFill>
-                      <a:srgbClr val="F9F9F9"/>
-                    </a:solidFill>
-                  </a:tcPr>
-                </a:tc>
-              </a:tr>
-              <a:tr h="472727">
-                <a:tc>
-                  <a:txBody>
-                    <a:bodyPr/>
-                    <a:lstStyle/>
-                    <a:p>
-                      <a:pPr algn="ctr">
-                        <a:defRPr sz="800" b="1">
-                          <a:solidFill>
-                            <a:srgbClr val="222222"/>
-                          </a:solidFill>
-                        </a:defRPr>
-                      </a:pPr>
-                      <a:r>
-                        <a:t>23</a:t>
-                      </a:r>
-                    </a:p>
-                  </a:txBody>
-                  <a:tcPr/>
-                </a:tc>
-                <a:tc>
-                  <a:txBody>
-                    <a:bodyPr/>
-                    <a:lstStyle/>
-                    <a:p>
-                      <a:pPr>
-                        <a:defRPr sz="650" b="0">
-                          <a:solidFill>
-                            <a:srgbClr val="222222"/>
-                          </a:solidFill>
-                        </a:defRPr>
-                      </a:pPr>
-                      <a:r>
-                        <a:t>Kim et al., IEEE ICCE, 2024 — 'BLE Eddystone Indoor Emergency Notification System'</a:t>
-                      </a:r>
-                    </a:p>
-                  </a:txBody>
-                  <a:tcPr/>
-                </a:tc>
-                <a:tc>
-                  <a:txBody>
-                    <a:bodyPr/>
-                    <a:lstStyle/>
-                    <a:p>
-                      <a:pPr>
-                        <a:defRPr sz="700">
-                          <a:solidFill>
-                            <a:srgbClr val="222222"/>
-                          </a:solidFill>
-                        </a:defRPr>
-                      </a:pPr>
-                      <a:r>
-                        <a:t>BLE Eddystone telemetry for passive proximity-based alerts without app installation</a:t>
-                      </a:r>
-                    </a:p>
-                  </a:txBody>
-                  <a:tcPr/>
-                </a:tc>
-                <a:tc>
-                  <a:txBody>
-                    <a:bodyPr/>
-                    <a:lstStyle/>
-                    <a:p>
-                      <a:pPr>
-                        <a:defRPr sz="700">
-                          <a:solidFill>
-                            <a:srgbClr val="222222"/>
-                          </a:solidFill>
-                        </a:defRPr>
-                      </a:pPr>
-                      <a:r>
-                        <a:t>Validates TRAPNET's BLE Eddystone SOS broadcast approach</a:t>
-                      </a:r>
-                    </a:p>
-                  </a:txBody>
-                  <a:tcPr/>
-                </a:tc>
-                <a:tc>
-                  <a:txBody>
-                    <a:bodyPr/>
-                    <a:lstStyle/>
-                    <a:p>
-                      <a:pPr>
-                        <a:defRPr sz="700">
-                          <a:solidFill>
-                            <a:srgbClr val="222222"/>
-                          </a:solidFill>
-                        </a:defRPr>
-                      </a:pPr>
-                      <a:r>
-                        <a:t>BLE only — no WiFi beacon, no GSM, no ESP-NOW mesh</a:t>
-                      </a:r>
-                    </a:p>
-                  </a:txBody>
-                  <a:tcPr/>
-                </a:tc>
-              </a:tr>
-              <a:tr h="472727">
-                <a:tc>
-                  <a:txBody>
-                    <a:bodyPr/>
-                    <a:lstStyle/>
-                    <a:p>
-                      <a:pPr algn="ctr">
-                        <a:defRPr sz="800" b="1">
-                          <a:solidFill>
-                            <a:srgbClr val="222222"/>
-                          </a:solidFill>
-                        </a:defRPr>
-                      </a:pPr>
-                      <a:r>
-                        <a:t>24</a:t>
-                      </a:r>
-                    </a:p>
-                  </a:txBody>
-                  <a:tcPr>
-                    <a:solidFill>
-                      <a:srgbClr val="F9F9F9"/>
-                    </a:solidFill>
-                  </a:tcPr>
-                </a:tc>
-                <a:tc>
-                  <a:txBody>
-                    <a:bodyPr/>
-                    <a:lstStyle/>
-                    <a:p>
-                      <a:pPr>
-                        <a:defRPr sz="650" b="0">
-                          <a:solidFill>
-                            <a:srgbClr val="222222"/>
-                          </a:solidFill>
-                        </a:defRPr>
-                      </a:pPr>
-                      <a:r>
-                        <a:t>Wang et al., IEEE AIEC, 2024 — 'Lightweight YOLOv8 on Raspberry Pi for Real-Time Security'</a:t>
-                      </a:r>
-                    </a:p>
-                  </a:txBody>
-                  <a:tcPr>
-                    <a:solidFill>
-                      <a:srgbClr val="F9F9F9"/>
-                    </a:solidFill>
-                  </a:tcPr>
-                </a:tc>
-                <a:tc>
-                  <a:txBody>
-                    <a:bodyPr/>
-                    <a:lstStyle/>
-                    <a:p>
-                      <a:pPr>
-                        <a:defRPr sz="700">
-                          <a:solidFill>
-                            <a:srgbClr val="222222"/>
-                          </a:solidFill>
-                        </a:defRPr>
-                      </a:pPr>
-                      <a:r>
-                        <a:t>Optimized YOLOv8 (INT8 quantization) on RPi for edge-based person detection</a:t>
-                      </a:r>
-                    </a:p>
-                  </a:txBody>
-                  <a:tcPr>
-                    <a:solidFill>
-                      <a:srgbClr val="F9F9F9"/>
-                    </a:solidFill>
-                  </a:tcPr>
-                </a:tc>
-                <a:tc>
-                  <a:txBody>
-                    <a:bodyPr/>
-                    <a:lstStyle/>
-                    <a:p>
-                      <a:pPr>
-                        <a:defRPr sz="700">
-                          <a:solidFill>
-                            <a:srgbClr val="222222"/>
-                          </a:solidFill>
-                        </a:defRPr>
-                      </a:pPr>
-                      <a:r>
-                        <a:t>Mirrors TRAPNET's AI pipeline — YOLOv8 on RPi Zero 2W for visual confirmation</a:t>
-                      </a:r>
-                    </a:p>
-                  </a:txBody>
-                  <a:tcPr>
-                    <a:solidFill>
-                      <a:srgbClr val="F9F9F9"/>
-                    </a:solidFill>
-                  </a:tcPr>
-                </a:tc>
-                <a:tc>
-                  <a:txBody>
-                    <a:bodyPr/>
-                    <a:lstStyle/>
-                    <a:p>
-                      <a:pPr>
-                        <a:defRPr sz="700">
-                          <a:solidFill>
-                            <a:srgbClr val="222222"/>
-                          </a:solidFill>
-                        </a:defRPr>
-                      </a:pPr>
-                      <a:r>
-                        <a:t>Camera only — no radar backup, no physical containment, no multi-SOS</a:t>
-                      </a:r>
-                    </a:p>
-                  </a:txBody>
-                  <a:tcPr>
-                    <a:solidFill>
-                      <a:srgbClr val="F9F9F9"/>
-                    </a:solidFill>
-                  </a:tcPr>
-                </a:tc>
-              </a:tr>
-              <a:tr h="472730">
-                <a:tc>
-                  <a:txBody>
-                    <a:bodyPr/>
-                    <a:lstStyle/>
-                    <a:p>
-                      <a:pPr algn="ctr">
-                        <a:defRPr sz="800" b="1">
-                          <a:solidFill>
-                            <a:srgbClr val="222222"/>
-                          </a:solidFill>
-                        </a:defRPr>
-                      </a:pPr>
-                      <a:r>
-                        <a:t>25</a:t>
-                      </a:r>
-                    </a:p>
-                  </a:txBody>
-                  <a:tcPr/>
-                </a:tc>
-                <a:tc>
-                  <a:txBody>
-                    <a:bodyPr/>
-                    <a:lstStyle/>
-                    <a:p>
-                      <a:pPr>
-                        <a:defRPr sz="650" b="0">
-                          <a:solidFill>
-                            <a:srgbClr val="222222"/>
-                          </a:solidFill>
-                        </a:defRPr>
-                      </a:pPr>
-                      <a:r>
-                        <a:t>Singh et al., IEEE ICSIC, 2024 — 'IoT Structural Vibration Monitoring for Forced Entry Detection'</a:t>
-                      </a:r>
-                    </a:p>
-                  </a:txBody>
-                  <a:tcPr/>
-                </a:tc>
-                <a:tc>
-                  <a:txBody>
-                    <a:bodyPr/>
-                    <a:lstStyle/>
-                    <a:p>
-                      <a:pPr>
-                        <a:defRPr sz="700">
-                          <a:solidFill>
-                            <a:srgbClr val="222222"/>
-                          </a:solidFill>
-                        </a:defRPr>
-                      </a:pPr>
-                      <a:r>
-                        <a:t>Impulse counting with sliding window to distinguish forced entry from ambient noise</a:t>
-                      </a:r>
-                    </a:p>
-                  </a:txBody>
-                  <a:tcPr/>
-                </a:tc>
-                <a:tc>
-                  <a:txBody>
-                    <a:bodyPr/>
-                    <a:lstStyle/>
-                    <a:p>
-                      <a:pPr>
-                        <a:defRPr sz="700">
-                          <a:solidFill>
-                            <a:srgbClr val="222222"/>
-                          </a:solidFill>
-                        </a:defRPr>
-                      </a:pPr>
-                      <a:r>
-                        <a:t>Validates TRAPNET's SW-420 vibration sensor pulse-counting approach</a:t>
-                      </a:r>
-                    </a:p>
-                  </a:txBody>
-                  <a:tcPr/>
-                </a:tc>
-                <a:tc>
-                  <a:txBody>
-                    <a:bodyPr/>
-                    <a:lstStyle/>
-                    <a:p>
-                      <a:pPr>
-                        <a:defRPr sz="700">
-                          <a:solidFill>
-                            <a:srgbClr val="222222"/>
-                          </a:solidFill>
-                        </a:defRPr>
-                      </a:pPr>
-                      <a:r>
-                        <a:t>Monitoring only — no auto door locking, no radar, no SOS alerts</a:t>
-                      </a:r>
-                    </a:p>
-                  </a:txBody>
-                  <a:tcPr/>
-                </a:tc>
-              </a:tr>
-            </a:tbl>
-          </a:graphicData>
-        </a:graphic>
-      </p:graphicFrame>
-    </p:spTree>
   </p:cSld>
   <p:clrMapOvr>
     <a:masterClrMapping/>
@@ -11551,6 +10854,91 @@
           </a:p>
         </p:txBody>
       </p:sp>
+      <p:pic>
+        <p:nvPicPr>
+          <p:cNvPr id="3" name="Picture 2">
+            <a:extLst>
+              <a:ext uri="{FF2B5EF4-FFF2-40B4-BE49-F238E27FC236}">
+                <a16:creationId xmlns:a16="http://schemas.microsoft.com/office/drawing/2014/main" id="{AC6F175B-D4CC-3E3F-764E-2A3D9C6448E4}"/>
+              </a:ext>
+            </a:extLst>
+          </p:cNvPr>
+          <p:cNvPicPr>
+            <a:picLocks noChangeAspect="1"/>
+          </p:cNvPicPr>
+          <p:nvPr/>
+        </p:nvPicPr>
+        <p:blipFill>
+          <a:blip r:embed="rId2">
+            <a:extLst>
+              <a:ext uri="{28A0092B-C50C-407E-A947-70E740481C1C}">
+                <a14:useLocalDpi xmlns:a14="http://schemas.microsoft.com/office/drawing/2010/main" val="0"/>
+              </a:ext>
+            </a:extLst>
+          </a:blip>
+          <a:stretch>
+            <a:fillRect/>
+          </a:stretch>
+        </p:blipFill>
+        <p:spPr>
+          <a:xfrm>
+            <a:off x="1849264" y="1722558"/>
+            <a:ext cx="5616624" cy="4802786"/>
+          </a:xfrm>
+          <a:prstGeom prst="rect">
+            <a:avLst/>
+          </a:prstGeom>
+        </p:spPr>
+      </p:pic>
+      <p:sp>
+        <p:nvSpPr>
+          <p:cNvPr id="7" name="TextBox 6">
+            <a:extLst>
+              <a:ext uri="{FF2B5EF4-FFF2-40B4-BE49-F238E27FC236}">
+                <a16:creationId xmlns:a16="http://schemas.microsoft.com/office/drawing/2014/main" id="{7598A8DA-1849-381C-47EB-B8AC166555EB}"/>
+              </a:ext>
+            </a:extLst>
+          </p:cNvPr>
+          <p:cNvSpPr txBox="1"/>
+          <p:nvPr/>
+        </p:nvSpPr>
+        <p:spPr>
+          <a:xfrm>
+            <a:off x="323528" y="1403484"/>
+            <a:ext cx="8568952" cy="369332"/>
+          </a:xfrm>
+          <a:prstGeom prst="rect">
+            <a:avLst/>
+          </a:prstGeom>
+          <a:noFill/>
+        </p:spPr>
+        <p:txBody>
+          <a:bodyPr wrap="square">
+            <a:spAutoFit/>
+          </a:bodyPr>
+          <a:lstStyle/>
+          <a:p>
+            <a:pPr algn="ctr">
+              <a:spcBef>
+                <a:spcPts val="100"/>
+              </a:spcBef>
+              <a:spcAft>
+                <a:spcPts val="0"/>
+              </a:spcAft>
+              <a:buNone/>
+            </a:pPr>
+            <a:r>
+              <a:rPr lang="en-US" b="1" dirty="0">
+                <a:solidFill>
+                  <a:srgbClr val="002060"/>
+                </a:solidFill>
+                <a:latin typeface="Times New Roman"/>
+              </a:rPr>
+              <a:t>Existing Conventional Security System Architecture</a:t>
+            </a:r>
+          </a:p>
+        </p:txBody>
+      </p:sp>
     </p:spTree>
     <p:extLst>
       <p:ext uri="{BB962C8B-B14F-4D97-AF65-F5344CB8AC3E}">
@@ -15287,70 +14675,50 @@
       </p:grpSpPr>
       <p:sp>
         <p:nvSpPr>
-          <p:cNvPr id="2" name="Title 1"/>
-          <p:cNvSpPr>
-            <a:spLocks noGrp="1"/>
-          </p:cNvSpPr>
-          <p:nvPr>
-            <p:ph type="title"/>
-          </p:nvPr>
+          <p:cNvPr id="2" name="TextBox 1"/>
+          <p:cNvSpPr txBox="1"/>
+          <p:nvPr/>
         </p:nvSpPr>
         <p:spPr>
           <a:xfrm>
-            <a:off x="298940" y="188640"/>
-            <a:ext cx="8593540" cy="1008112"/>
+            <a:off x="323528" y="267574"/>
+            <a:ext cx="8568952" cy="895832"/>
           </a:xfrm>
+          <a:prstGeom prst="rect">
+            <a:avLst/>
+          </a:prstGeom>
+          <a:noFill/>
         </p:spPr>
         <p:txBody>
-          <a:bodyPr>
-            <a:normAutofit/>
+          <a:bodyPr wrap="square">
+            <a:spAutoFit/>
           </a:bodyPr>
           <a:lstStyle/>
           <a:p>
-            <a:pPr>
-              <a:spcBef>
-                <a:spcPts val="0"/>
-              </a:spcBef>
-              <a:spcAft>
-                <a:spcPts val="0"/>
-              </a:spcAft>
-              <a:buNone/>
+            <a:pPr algn="l">
+              <a:defRPr sz="2800" b="1">
+                <a:solidFill>
+                  <a:srgbClr val="000000"/>
+                </a:solidFill>
+              </a:defRPr>
             </a:pPr>
             <a:r>
-              <a:rPr lang="en-US" sz="2400" b="1" dirty="0">
-                <a:solidFill>
-                  <a:srgbClr val="8B0000"/>
-                </a:solidFill>
-                <a:latin typeface="Times New Roman" panose="02020603050405020304" pitchFamily="18" charset="0"/>
-              </a:rPr>
-              <a:t>Methodology – Four Layer Pipeline Architecture</a:t>
+              <a:t>Literature Survey (Continued)</a:t>
             </a:r>
           </a:p>
         </p:txBody>
       </p:sp>
       <p:graphicFrame>
         <p:nvGraphicFramePr>
-          <p:cNvPr id="4" name="Table 3">
-            <a:extLst>
-              <a:ext uri="{FF2B5EF4-FFF2-40B4-BE49-F238E27FC236}">
-                <a16:creationId xmlns:a16="http://schemas.microsoft.com/office/drawing/2014/main" id="{98B7C7A9-1323-CCD5-7514-AFF5EF4FFBDB}"/>
-              </a:ext>
-            </a:extLst>
-          </p:cNvPr>
+          <p:cNvPr id="3" name="Table 2"/>
           <p:cNvGraphicFramePr>
             <a:graphicFrameLocks noGrp="1"/>
           </p:cNvGraphicFramePr>
-          <p:nvPr>
-            <p:extLst>
-              <p:ext uri="{D42A27DB-BD31-4B8C-83A1-F6EECF244321}">
-                <p14:modId xmlns:p14="http://schemas.microsoft.com/office/powerpoint/2010/main" val="256273367"/>
-              </p:ext>
-            </p:extLst>
-          </p:nvPr>
+          <p:nvPr/>
         </p:nvGraphicFramePr>
         <p:xfrm>
-          <a:off x="317500" y="1196752"/>
-          <a:ext cx="8574980" cy="5511910"/>
+          <a:off x="323528" y="1196752"/>
+          <a:ext cx="8568952" cy="5200000"/>
         </p:xfrm>
         <a:graphic>
           <a:graphicData uri="http://schemas.openxmlformats.org/drawingml/2006/table">
@@ -15359,484 +14727,1293 @@
                 <a:tableStyleId>{5C22544A-7EE6-4342-B048-85BDC9FD1C3A}</a:tableStyleId>
               </a:tblPr>
               <a:tblGrid>
-                <a:gridCol w="1599810">
+                <a:gridCol w="450000">
                   <a:extLst>
                     <a:ext uri="{9D8B030D-6E8A-4147-A177-3AD203B41FA5}">
-                      <a16:colId xmlns:a16="http://schemas.microsoft.com/office/drawing/2014/main" val="771754902"/>
+                      <a16:colId xmlns:a16="http://schemas.microsoft.com/office/drawing/2014/main" val="20000"/>
                     </a:ext>
                   </a:extLst>
                 </a:gridCol>
-                <a:gridCol w="3007642">
+                <a:gridCol w="2800000">
                   <a:extLst>
                     <a:ext uri="{9D8B030D-6E8A-4147-A177-3AD203B41FA5}">
-                      <a16:colId xmlns:a16="http://schemas.microsoft.com/office/drawing/2014/main" val="3485524538"/>
+                      <a16:colId xmlns:a16="http://schemas.microsoft.com/office/drawing/2014/main" val="20001"/>
                     </a:ext>
                   </a:extLst>
                 </a:gridCol>
-                <a:gridCol w="3967528">
+                <a:gridCol w="1600000">
                   <a:extLst>
                     <a:ext uri="{9D8B030D-6E8A-4147-A177-3AD203B41FA5}">
-                      <a16:colId xmlns:a16="http://schemas.microsoft.com/office/drawing/2014/main" val="3380436145"/>
+                      <a16:colId xmlns:a16="http://schemas.microsoft.com/office/drawing/2014/main" val="20002"/>
+                    </a:ext>
+                  </a:extLst>
+                </a:gridCol>
+                <a:gridCol w="2000000">
+                  <a:extLst>
+                    <a:ext uri="{9D8B030D-6E8A-4147-A177-3AD203B41FA5}">
+                      <a16:colId xmlns:a16="http://schemas.microsoft.com/office/drawing/2014/main" val="20003"/>
+                    </a:ext>
+                  </a:extLst>
+                </a:gridCol>
+                <a:gridCol w="1718952">
+                  <a:extLst>
+                    <a:ext uri="{9D8B030D-6E8A-4147-A177-3AD203B41FA5}">
+                      <a16:colId xmlns:a16="http://schemas.microsoft.com/office/drawing/2014/main" val="20004"/>
                     </a:ext>
                   </a:extLst>
                 </a:gridCol>
               </a:tblGrid>
-              <a:tr h="1102382">
-                <a:tc>
-                  <a:txBody>
-                    <a:bodyPr/>
-                    <a:lstStyle/>
-                    <a:p>
-                      <a:r>
-                        <a:rPr lang="en-IN" sz="1300" b="1">
+              <a:tr h="472727">
+                <a:tc>
+                  <a:txBody>
+                    <a:bodyPr/>
+                    <a:lstStyle/>
+                    <a:p>
+                      <a:pPr algn="ctr">
+                        <a:defRPr sz="800" b="1">
                           <a:solidFill>
                             <a:srgbClr val="FFFFFF"/>
                           </a:solidFill>
-                          <a:latin typeface="Times New Roman" panose="02020603050405020304" pitchFamily="18" charset="0"/>
-                        </a:rPr>
-                        <a:t>Pipeline Layer</a:t>
-                      </a:r>
-                    </a:p>
-                  </a:txBody>
-                  <a:tcPr>
-                    <a:solidFill>
-                      <a:srgbClr val="8B0000"/>
-                    </a:solidFill>
-                  </a:tcPr>
-                </a:tc>
-                <a:tc>
-                  <a:txBody>
-                    <a:bodyPr/>
-                    <a:lstStyle/>
-                    <a:p>
-                      <a:r>
-                        <a:rPr lang="en-IN" sz="1300" b="1" dirty="0">
+                        </a:defRPr>
+                      </a:pPr>
+                      <a:r>
+                        <a:t>Sl.</a:t>
+                      </a:r>
+                    </a:p>
+                    <a:p>
+                      <a:pPr algn="ctr">
+                        <a:defRPr sz="800" b="1">
                           <a:solidFill>
                             <a:srgbClr val="FFFFFF"/>
                           </a:solidFill>
-                          <a:latin typeface="Times New Roman" panose="02020603050405020304" pitchFamily="18" charset="0"/>
-                        </a:rPr>
-                        <a:t>Hardware &amp; Components</a:t>
-                      </a:r>
-                    </a:p>
-                  </a:txBody>
-                  <a:tcPr>
-                    <a:solidFill>
-                      <a:srgbClr val="8B0000"/>
-                    </a:solidFill>
-                  </a:tcPr>
-                </a:tc>
-                <a:tc>
-                  <a:txBody>
-                    <a:bodyPr/>
-                    <a:lstStyle/>
-                    <a:p>
-                      <a:r>
-                        <a:rPr lang="en-IN" sz="1300" b="1">
+                        </a:defRPr>
+                      </a:pPr>
+                      <a:r>
+                        <a:t>No</a:t>
+                      </a:r>
+                    </a:p>
+                  </a:txBody>
+                  <a:tcPr>
+                    <a:solidFill>
+                      <a:srgbClr val="111111"/>
+                    </a:solidFill>
+                  </a:tcPr>
+                </a:tc>
+                <a:tc>
+                  <a:txBody>
+                    <a:bodyPr/>
+                    <a:lstStyle/>
+                    <a:p>
+                      <a:pPr algn="ctr">
+                        <a:defRPr sz="800" b="1">
                           <a:solidFill>
                             <a:srgbClr val="FFFFFF"/>
                           </a:solidFill>
-                          <a:latin typeface="Times New Roman" panose="02020603050405020304" pitchFamily="18" charset="0"/>
-                        </a:rPr>
-                        <a:t>Operational Mechanism &amp; Signal Flow</a:t>
-                      </a:r>
-                    </a:p>
-                  </a:txBody>
-                  <a:tcPr>
-                    <a:solidFill>
-                      <a:srgbClr val="8B0000"/>
+                        </a:defRPr>
+                      </a:pPr>
+                      <a:r>
+                        <a:t>Author &amp; Paper Title</a:t>
+                      </a:r>
+                    </a:p>
+                  </a:txBody>
+                  <a:tcPr>
+                    <a:solidFill>
+                      <a:srgbClr val="111111"/>
+                    </a:solidFill>
+                  </a:tcPr>
+                </a:tc>
+                <a:tc>
+                  <a:txBody>
+                    <a:bodyPr/>
+                    <a:lstStyle/>
+                    <a:p>
+                      <a:pPr algn="ctr">
+                        <a:defRPr sz="800" b="1">
+                          <a:solidFill>
+                            <a:srgbClr val="FFFFFF"/>
+                          </a:solidFill>
+                        </a:defRPr>
+                      </a:pPr>
+                      <a:r>
+                        <a:t>Methodology</a:t>
+                      </a:r>
+                    </a:p>
+                  </a:txBody>
+                  <a:tcPr>
+                    <a:solidFill>
+                      <a:srgbClr val="111111"/>
+                    </a:solidFill>
+                  </a:tcPr>
+                </a:tc>
+                <a:tc>
+                  <a:txBody>
+                    <a:bodyPr/>
+                    <a:lstStyle/>
+                    <a:p>
+                      <a:pPr algn="ctr">
+                        <a:defRPr sz="800" b="1">
+                          <a:solidFill>
+                            <a:srgbClr val="FFFFFF"/>
+                          </a:solidFill>
+                        </a:defRPr>
+                      </a:pPr>
+                      <a:r>
+                        <a:t>Learning / Finding</a:t>
+                      </a:r>
+                    </a:p>
+                  </a:txBody>
+                  <a:tcPr>
+                    <a:solidFill>
+                      <a:srgbClr val="111111"/>
+                    </a:solidFill>
+                  </a:tcPr>
+                </a:tc>
+                <a:tc>
+                  <a:txBody>
+                    <a:bodyPr/>
+                    <a:lstStyle/>
+                    <a:p>
+                      <a:pPr algn="ctr">
+                        <a:defRPr sz="800" b="1">
+                          <a:solidFill>
+                            <a:srgbClr val="FFFFFF"/>
+                          </a:solidFill>
+                        </a:defRPr>
+                      </a:pPr>
+                      <a:r>
+                        <a:t>Future Enhancement</a:t>
+                      </a:r>
+                    </a:p>
+                  </a:txBody>
+                  <a:tcPr>
+                    <a:solidFill>
+                      <a:srgbClr val="111111"/>
                     </a:solidFill>
                   </a:tcPr>
                 </a:tc>
                 <a:extLst>
                   <a:ext uri="{0D108BD9-81ED-4DB2-BD59-A6C34878D82A}">
-                    <a16:rowId xmlns:a16="http://schemas.microsoft.com/office/drawing/2014/main" val="3631563013"/>
+                    <a16:rowId xmlns:a16="http://schemas.microsoft.com/office/drawing/2014/main" val="10000"/>
                   </a:ext>
                 </a:extLst>
               </a:tr>
-              <a:tr h="1102382">
-                <a:tc>
-                  <a:txBody>
-                    <a:bodyPr/>
-                    <a:lstStyle/>
-                    <a:p>
-                      <a:r>
-                        <a:rPr lang="en-IN" sz="1050" b="1">
-                          <a:solidFill>
-                            <a:srgbClr val="0A0A0A"/>
-                          </a:solidFill>
-                          <a:latin typeface="Times New Roman" panose="02020603050405020304" pitchFamily="18" charset="0"/>
-                        </a:rPr>
-                        <a:t>Layer 1: DETECT
-(Sensors)</a:t>
-                      </a:r>
-                    </a:p>
-                  </a:txBody>
-                  <a:tcPr>
-                    <a:solidFill>
-                      <a:srgbClr val="FFFFFF"/>
-                    </a:solidFill>
-                  </a:tcPr>
-                </a:tc>
-                <a:tc>
-                  <a:txBody>
-                    <a:bodyPr/>
-                    <a:lstStyle/>
-                    <a:p>
-                      <a:r>
-                        <a:rPr lang="en-IN" sz="1050" b="0">
-                          <a:solidFill>
-                            <a:srgbClr val="0A0A0A"/>
-                          </a:solidFill>
-                          <a:latin typeface="Times New Roman" panose="02020603050405020304" pitchFamily="18" charset="0"/>
-                        </a:rPr>
-                        <a:t>• LD2410C 24GHz mmWave Radar
-• IR Sensors (Door &amp; Window)
-• SW-420 Vibration Sensors (x2)
-• NEO-6M GPS Module
-• CCTV Camera (RPi CSI)</a:t>
-                      </a:r>
-                    </a:p>
-                  </a:txBody>
-                  <a:tcPr>
-                    <a:solidFill>
-                      <a:srgbClr val="FFFFFF"/>
-                    </a:solidFill>
-                  </a:tcPr>
-                </a:tc>
-                <a:tc>
-                  <a:txBody>
-                    <a:bodyPr/>
-                    <a:lstStyle/>
-                    <a:p>
-                      <a:r>
-                        <a:rPr lang="en-US" sz="1050" b="0" dirty="0">
-                          <a:solidFill>
-                            <a:srgbClr val="0A0A0A"/>
-                          </a:solidFill>
-                          <a:latin typeface="Times New Roman" panose="02020603050405020304" pitchFamily="18" charset="0"/>
-                        </a:rPr>
-                        <a:t>Fuses radar micro-breathing detection, IR beam-break, vibration triggers, and GPS location tracking. Sends real-time sensor signals to ESP32 coordinator.</a:t>
-                      </a:r>
-                      <a:endParaRPr lang="en-IN" sz="1050" b="0" dirty="0">
-                        <a:solidFill>
-                          <a:srgbClr val="0A0A0A"/>
-                        </a:solidFill>
-                        <a:latin typeface="Times New Roman" panose="02020603050405020304" pitchFamily="18" charset="0"/>
-                      </a:endParaRPr>
-                    </a:p>
-                  </a:txBody>
-                  <a:tcPr>
-                    <a:solidFill>
-                      <a:srgbClr val="FFFFFF"/>
+              <a:tr h="472727">
+                <a:tc>
+                  <a:txBody>
+                    <a:bodyPr/>
+                    <a:lstStyle/>
+                    <a:p>
+                      <a:pPr algn="ctr">
+                        <a:defRPr sz="800" b="1">
+                          <a:solidFill>
+                            <a:srgbClr val="222222"/>
+                          </a:solidFill>
+                        </a:defRPr>
+                      </a:pPr>
+                      <a:r>
+                        <a:t>16</a:t>
+                      </a:r>
+                    </a:p>
+                  </a:txBody>
+                  <a:tcPr>
+                    <a:solidFill>
+                      <a:srgbClr val="F9F9F9"/>
+                    </a:solidFill>
+                  </a:tcPr>
+                </a:tc>
+                <a:tc>
+                  <a:txBody>
+                    <a:bodyPr/>
+                    <a:lstStyle/>
+                    <a:p>
+                      <a:pPr>
+                        <a:defRPr sz="650" b="0">
+                          <a:solidFill>
+                            <a:srgbClr val="222222"/>
+                          </a:solidFill>
+                        </a:defRPr>
+                      </a:pPr>
+                      <a:r>
+                        <a:t>Li et al., IEEE Trans. Ind. Informatics, 2025 — 'Systematic Vital Signs Detection via FMCW MIMO Radar'</a:t>
+                      </a:r>
+                    </a:p>
+                  </a:txBody>
+                  <a:tcPr>
+                    <a:solidFill>
+                      <a:srgbClr val="F9F9F9"/>
+                    </a:solidFill>
+                  </a:tcPr>
+                </a:tc>
+                <a:tc>
+                  <a:txBody>
+                    <a:bodyPr/>
+                    <a:lstStyle/>
+                    <a:p>
+                      <a:pPr>
+                        <a:defRPr sz="700">
+                          <a:solidFill>
+                            <a:srgbClr val="222222"/>
+                          </a:solidFill>
+                        </a:defRPr>
+                      </a:pPr>
+                      <a:r>
+                        <a:t>FMCW MIMO radar with maximum ratio combining &amp; FastICA for breathing/heartbeat</a:t>
+                      </a:r>
+                    </a:p>
+                  </a:txBody>
+                  <a:tcPr>
+                    <a:solidFill>
+                      <a:srgbClr val="F9F9F9"/>
+                    </a:solidFill>
+                  </a:tcPr>
+                </a:tc>
+                <a:tc>
+                  <a:txBody>
+                    <a:bodyPr/>
+                    <a:lstStyle/>
+                    <a:p>
+                      <a:pPr>
+                        <a:defRPr sz="700">
+                          <a:solidFill>
+                            <a:srgbClr val="222222"/>
+                          </a:solidFill>
+                        </a:defRPr>
+                      </a:pPr>
+                      <a:r>
+                        <a:t>Validates TRAPNET's LD2410C FMCW micro-Doppler approach for detecting stationary humans</a:t>
+                      </a:r>
+                    </a:p>
+                  </a:txBody>
+                  <a:tcPr>
+                    <a:solidFill>
+                      <a:srgbClr val="F9F9F9"/>
+                    </a:solidFill>
+                  </a:tcPr>
+                </a:tc>
+                <a:tc>
+                  <a:txBody>
+                    <a:bodyPr/>
+                    <a:lstStyle/>
+                    <a:p>
+                      <a:pPr>
+                        <a:defRPr sz="700">
+                          <a:solidFill>
+                            <a:srgbClr val="222222"/>
+                          </a:solidFill>
+                        </a:defRPr>
+                      </a:pPr>
+                      <a:r>
+                        <a:t>No intrusion response, no door locking, no SOS integration</a:t>
+                      </a:r>
+                    </a:p>
+                  </a:txBody>
+                  <a:tcPr>
+                    <a:solidFill>
+                      <a:srgbClr val="F9F9F9"/>
                     </a:solidFill>
                   </a:tcPr>
                 </a:tc>
                 <a:extLst>
                   <a:ext uri="{0D108BD9-81ED-4DB2-BD59-A6C34878D82A}">
-                    <a16:rowId xmlns:a16="http://schemas.microsoft.com/office/drawing/2014/main" val="416494945"/>
+                    <a16:rowId xmlns:a16="http://schemas.microsoft.com/office/drawing/2014/main" val="10001"/>
                   </a:ext>
                 </a:extLst>
               </a:tr>
-              <a:tr h="1102382">
-                <a:tc>
-                  <a:txBody>
-                    <a:bodyPr/>
-                    <a:lstStyle/>
-                    <a:p>
-                      <a:r>
-                        <a:rPr lang="en-IN" sz="1050" b="1">
-                          <a:solidFill>
-                            <a:srgbClr val="0A0A0A"/>
-                          </a:solidFill>
-                          <a:latin typeface="Times New Roman" panose="02020603050405020304" pitchFamily="18" charset="0"/>
-                        </a:rPr>
-                        <a:t>Layer 2: PROCESS
-(Edge-AI Fusion)</a:t>
-                      </a:r>
-                    </a:p>
-                  </a:txBody>
-                  <a:tcPr>
-                    <a:solidFill>
-                      <a:srgbClr val="F0F0F0"/>
-                    </a:solidFill>
-                  </a:tcPr>
-                </a:tc>
-                <a:tc>
-                  <a:txBody>
-                    <a:bodyPr/>
-                    <a:lstStyle/>
-                    <a:p>
-                      <a:r>
-                        <a:rPr lang="en-US" sz="1050" b="0" dirty="0">
-                          <a:solidFill>
-                            <a:srgbClr val="0A0A0A"/>
-                          </a:solidFill>
-                          <a:latin typeface="Times New Roman" panose="02020603050405020304" pitchFamily="18" charset="0"/>
-                        </a:rPr>
-                        <a:t>• ESP32 </a:t>
-                      </a:r>
-                      <a:r>
-                        <a:rPr lang="en-US" sz="1050" b="0" dirty="0" err="1">
-                          <a:solidFill>
-                            <a:srgbClr val="0A0A0A"/>
-                          </a:solidFill>
-                          <a:latin typeface="Times New Roman" panose="02020603050405020304" pitchFamily="18" charset="0"/>
-                        </a:rPr>
-                        <a:t>DevKit</a:t>
-                      </a:r>
-                      <a:r>
-                        <a:rPr lang="en-US" sz="1050" b="0" dirty="0">
-                          <a:solidFill>
-                            <a:srgbClr val="0A0A0A"/>
-                          </a:solidFill>
-                          <a:latin typeface="Times New Roman" panose="02020603050405020304" pitchFamily="18" charset="0"/>
-                        </a:rPr>
-                        <a:t> V1 (Main Hub)
-• Raspberry Pi Zero 2W
-• Dual LM2596 Bucks (5V / 4V)
-• 18650 Battery System (TP4056)</a:t>
-                      </a:r>
-                      <a:endParaRPr lang="en-IN" sz="1050" b="0" dirty="0">
-                        <a:solidFill>
-                          <a:srgbClr val="0A0A0A"/>
-                        </a:solidFill>
-                        <a:latin typeface="Times New Roman" panose="02020603050405020304" pitchFamily="18" charset="0"/>
-                      </a:endParaRPr>
-                    </a:p>
-                  </a:txBody>
-                  <a:tcPr>
-                    <a:solidFill>
-                      <a:srgbClr val="F0F0F0"/>
-                    </a:solidFill>
-                  </a:tcPr>
-                </a:tc>
-                <a:tc>
-                  <a:txBody>
-                    <a:bodyPr/>
-                    <a:lstStyle/>
-                    <a:p>
-                      <a:r>
-                        <a:rPr lang="en-IN" sz="1050" b="0" dirty="0">
-                          <a:solidFill>
-                            <a:srgbClr val="0A0A0A"/>
-                          </a:solidFill>
-                          <a:latin typeface="Times New Roman" panose="02020603050405020304" pitchFamily="18" charset="0"/>
-                        </a:rPr>
-                        <a:t>ESP32 fuses multi-sensor inputs in &lt;500ms. Raspberry Pi runs OpenCV + YOLOv8 vision AI for secondary confirmation over MQTT Serial bridge to prevent false alarms.</a:t>
-                      </a:r>
-                    </a:p>
-                  </a:txBody>
-                  <a:tcPr>
-                    <a:solidFill>
-                      <a:srgbClr val="F0F0F0"/>
-                    </a:solidFill>
-                  </a:tcPr>
+              <a:tr h="472727">
+                <a:tc>
+                  <a:txBody>
+                    <a:bodyPr/>
+                    <a:lstStyle/>
+                    <a:p>
+                      <a:pPr algn="ctr">
+                        <a:defRPr sz="800" b="1">
+                          <a:solidFill>
+                            <a:srgbClr val="222222"/>
+                          </a:solidFill>
+                        </a:defRPr>
+                      </a:pPr>
+                      <a:r>
+                        <a:t>17</a:t>
+                      </a:r>
+                    </a:p>
+                  </a:txBody>
+                  <a:tcPr/>
+                </a:tc>
+                <a:tc>
+                  <a:txBody>
+                    <a:bodyPr/>
+                    <a:lstStyle/>
+                    <a:p>
+                      <a:pPr>
+                        <a:defRPr sz="650" b="0">
+                          <a:solidFill>
+                            <a:srgbClr val="222222"/>
+                          </a:solidFill>
+                        </a:defRPr>
+                      </a:pPr>
+                      <a:r>
+                        <a:t>Chen et al., IEEE Sensors Journal, 2025 — 'Contactless Vital Sign Monitoring on Edge Devices with T-CNN and mmWave'</a:t>
+                      </a:r>
+                    </a:p>
+                  </a:txBody>
+                  <a:tcPr/>
+                </a:tc>
+                <a:tc>
+                  <a:txBody>
+                    <a:bodyPr/>
+                    <a:lstStyle/>
+                    <a:p>
+                      <a:pPr>
+                        <a:defRPr sz="700">
+                          <a:solidFill>
+                            <a:srgbClr val="222222"/>
+                          </a:solidFill>
+                        </a:defRPr>
+                      </a:pPr>
+                      <a:r>
+                        <a:t>Low-complexity T-CNN on edge devices for breath/heart rate extraction from FMCW radar</a:t>
+                      </a:r>
+                    </a:p>
+                  </a:txBody>
+                  <a:tcPr/>
+                </a:tc>
+                <a:tc>
+                  <a:txBody>
+                    <a:bodyPr/>
+                    <a:lstStyle/>
+                    <a:p>
+                      <a:pPr>
+                        <a:defRPr sz="700">
+                          <a:solidFill>
+                            <a:srgbClr val="222222"/>
+                          </a:solidFill>
+                        </a:defRPr>
+                      </a:pPr>
+                      <a:r>
+                        <a:t>Validates edge deployment of radar processing on resource-constrained devices like ESP32-S3</a:t>
+                      </a:r>
+                    </a:p>
+                  </a:txBody>
+                  <a:tcPr/>
+                </a:tc>
+                <a:tc>
+                  <a:txBody>
+                    <a:bodyPr/>
+                    <a:lstStyle/>
+                    <a:p>
+                      <a:pPr>
+                        <a:defRPr sz="700">
+                          <a:solidFill>
+                            <a:srgbClr val="222222"/>
+                          </a:solidFill>
+                        </a:defRPr>
+                      </a:pPr>
+                      <a:r>
+                        <a:t>Health monitoring only — no security context, no multi-sensor fusion</a:t>
+                      </a:r>
+                    </a:p>
+                  </a:txBody>
+                  <a:tcPr/>
                 </a:tc>
                 <a:extLst>
                   <a:ext uri="{0D108BD9-81ED-4DB2-BD59-A6C34878D82A}">
-                    <a16:rowId xmlns:a16="http://schemas.microsoft.com/office/drawing/2014/main" val="3978210183"/>
+                    <a16:rowId xmlns:a16="http://schemas.microsoft.com/office/drawing/2014/main" val="10002"/>
                   </a:ext>
                 </a:extLst>
               </a:tr>
-              <a:tr h="1102382">
-                <a:tc>
-                  <a:txBody>
-                    <a:bodyPr/>
-                    <a:lstStyle/>
-                    <a:p>
-                      <a:r>
-                        <a:rPr lang="en-IN" sz="1050" b="1">
-                          <a:solidFill>
-                            <a:srgbClr val="0A0A0A"/>
-                          </a:solidFill>
-                          <a:latin typeface="Times New Roman" panose="02020603050405020304" pitchFamily="18" charset="0"/>
-                        </a:rPr>
-                        <a:t>Layer 3: RESPOND
-(Actuation &amp; Log)</a:t>
-                      </a:r>
-                    </a:p>
-                  </a:txBody>
-                  <a:tcPr>
-                    <a:solidFill>
-                      <a:srgbClr val="FFFFFF"/>
-                    </a:solidFill>
-                  </a:tcPr>
-                </a:tc>
-                <a:tc>
-                  <a:txBody>
-                    <a:bodyPr/>
-                    <a:lstStyle/>
-                    <a:p>
-                      <a:r>
-                        <a:rPr lang="en-US" sz="1050" b="0">
-                          <a:solidFill>
-                            <a:srgbClr val="0A0A0A"/>
-                          </a:solidFill>
-                          <a:latin typeface="Times New Roman" panose="02020603050405020304" pitchFamily="18" charset="0"/>
-                        </a:rPr>
-                        <a:t>• 2-Ch Relay Module (Active-LOW)
-• 12V Solenoid Door Lock
-• MicroSD Card Module (16GB)
-• 0.96 inch OLED Display (SSD1306)</a:t>
-                      </a:r>
-                      <a:endParaRPr lang="en-IN" sz="1050" b="0">
-                        <a:solidFill>
-                          <a:srgbClr val="0A0A0A"/>
-                        </a:solidFill>
-                        <a:latin typeface="Times New Roman" panose="02020603050405020304" pitchFamily="18" charset="0"/>
-                      </a:endParaRPr>
-                    </a:p>
-                  </a:txBody>
-                  <a:tcPr>
-                    <a:solidFill>
-                      <a:srgbClr val="FFFFFF"/>
-                    </a:solidFill>
-                  </a:tcPr>
-                </a:tc>
-                <a:tc>
-                  <a:txBody>
-                    <a:bodyPr/>
-                    <a:lstStyle/>
-                    <a:p>
-                      <a:r>
-                        <a:rPr lang="en-US" sz="1050" b="0">
-                          <a:solidFill>
-                            <a:srgbClr val="0A0A0A"/>
-                          </a:solidFill>
-                          <a:latin typeface="Times New Roman" panose="02020603050405020304" pitchFamily="18" charset="0"/>
-                        </a:rPr>
-                        <a:t>Relay triggers 12V solenoid lock within 3s upon threat confirmation to trap intruder. System status displayed on OLED HUD; events logged to FAT32 MicroSD.</a:t>
-                      </a:r>
-                      <a:endParaRPr lang="en-IN" sz="1050" b="0">
-                        <a:solidFill>
-                          <a:srgbClr val="0A0A0A"/>
-                        </a:solidFill>
-                        <a:latin typeface="Times New Roman" panose="02020603050405020304" pitchFamily="18" charset="0"/>
-                      </a:endParaRPr>
-                    </a:p>
-                  </a:txBody>
-                  <a:tcPr>
-                    <a:solidFill>
-                      <a:srgbClr val="FFFFFF"/>
+              <a:tr h="472727">
+                <a:tc>
+                  <a:txBody>
+                    <a:bodyPr/>
+                    <a:lstStyle/>
+                    <a:p>
+                      <a:pPr algn="ctr">
+                        <a:defRPr sz="800" b="1">
+                          <a:solidFill>
+                            <a:srgbClr val="222222"/>
+                          </a:solidFill>
+                        </a:defRPr>
+                      </a:pPr>
+                      <a:r>
+                        <a:t>18</a:t>
+                      </a:r>
+                    </a:p>
+                  </a:txBody>
+                  <a:tcPr>
+                    <a:solidFill>
+                      <a:srgbClr val="F9F9F9"/>
+                    </a:solidFill>
+                  </a:tcPr>
+                </a:tc>
+                <a:tc>
+                  <a:txBody>
+                    <a:bodyPr/>
+                    <a:lstStyle/>
+                    <a:p>
+                      <a:pPr>
+                        <a:defRPr sz="650" b="0">
+                          <a:solidFill>
+                            <a:srgbClr val="222222"/>
+                          </a:solidFill>
+                        </a:defRPr>
+                      </a:pPr>
+                      <a:r>
+                        <a:t>Russo et al., IEEE Access, 2025 — 'Contactless Monitoring Using Multiple FMCW Radars in 24 GHz Band'</a:t>
+                      </a:r>
+                    </a:p>
+                  </a:txBody>
+                  <a:tcPr>
+                    <a:solidFill>
+                      <a:srgbClr val="F9F9F9"/>
+                    </a:solidFill>
+                  </a:tcPr>
+                </a:tc>
+                <a:tc>
+                  <a:txBody>
+                    <a:bodyPr/>
+                    <a:lstStyle/>
+                    <a:p>
+                      <a:pPr>
+                        <a:defRPr sz="700">
+                          <a:solidFill>
+                            <a:srgbClr val="222222"/>
+                          </a:solidFill>
+                        </a:defRPr>
+                      </a:pPr>
+                      <a:r>
+                        <a:t>24GHz FMCW radar with Bayesian filtering for real-time vital sign estimation</a:t>
+                      </a:r>
+                    </a:p>
+                  </a:txBody>
+                  <a:tcPr>
+                    <a:solidFill>
+                      <a:srgbClr val="F9F9F9"/>
+                    </a:solidFill>
+                  </a:tcPr>
+                </a:tc>
+                <a:tc>
+                  <a:txBody>
+                    <a:bodyPr/>
+                    <a:lstStyle/>
+                    <a:p>
+                      <a:pPr>
+                        <a:defRPr sz="700">
+                          <a:solidFill>
+                            <a:srgbClr val="222222"/>
+                          </a:solidFill>
+                        </a:defRPr>
+                      </a:pPr>
+                      <a:r>
+                        <a:t>Same 24GHz band as TRAPNET's LD2410C; real-time breathing detection validated</a:t>
+                      </a:r>
+                    </a:p>
+                  </a:txBody>
+                  <a:tcPr>
+                    <a:solidFill>
+                      <a:srgbClr val="F9F9F9"/>
+                    </a:solidFill>
+                  </a:tcPr>
+                </a:tc>
+                <a:tc>
+                  <a:txBody>
+                    <a:bodyPr/>
+                    <a:lstStyle/>
+                    <a:p>
+                      <a:pPr>
+                        <a:defRPr sz="700">
+                          <a:solidFill>
+                            <a:srgbClr val="222222"/>
+                          </a:solidFill>
+                        </a:defRPr>
+                      </a:pPr>
+                      <a:r>
+                        <a:t>No intruder detection logic, no embedded security system</a:t>
+                      </a:r>
+                    </a:p>
+                  </a:txBody>
+                  <a:tcPr>
+                    <a:solidFill>
+                      <a:srgbClr val="F9F9F9"/>
                     </a:solidFill>
                   </a:tcPr>
                 </a:tc>
                 <a:extLst>
                   <a:ext uri="{0D108BD9-81ED-4DB2-BD59-A6C34878D82A}">
-                    <a16:rowId xmlns:a16="http://schemas.microsoft.com/office/drawing/2014/main" val="4001823203"/>
+                    <a16:rowId xmlns:a16="http://schemas.microsoft.com/office/drawing/2014/main" val="10003"/>
                   </a:ext>
                 </a:extLst>
               </a:tr>
-              <a:tr h="1102382">
-                <a:tc>
-                  <a:txBody>
-                    <a:bodyPr/>
-                    <a:lstStyle/>
-                    <a:p>
-                      <a:r>
-                        <a:rPr lang="en-IN" sz="1050" b="1">
-                          <a:solidFill>
-                            <a:srgbClr val="0A0A0A"/>
-                          </a:solidFill>
-                          <a:latin typeface="Times New Roman" panose="02020603050405020304" pitchFamily="18" charset="0"/>
-                        </a:rPr>
-                        <a:t>Layer 4: ALERT
-(Multi-Layer SOS)</a:t>
-                      </a:r>
-                    </a:p>
-                  </a:txBody>
-                  <a:tcPr>
-                    <a:solidFill>
-                      <a:srgbClr val="F0F0F0"/>
-                    </a:solidFill>
-                  </a:tcPr>
-                </a:tc>
-                <a:tc>
-                  <a:txBody>
-                    <a:bodyPr/>
-                    <a:lstStyle/>
-                    <a:p>
-                      <a:r>
-                        <a:rPr lang="en-IN" sz="1050" b="0" dirty="0">
-                          <a:solidFill>
-                            <a:srgbClr val="0A0A0A"/>
-                          </a:solidFill>
-                          <a:latin typeface="Times New Roman" panose="02020603050405020304" pitchFamily="18" charset="0"/>
-                        </a:rPr>
-                        <a:t>• SIM800L GSM Module (+1000uF cap)
-• Onboard ESP32 Radios
-  (</a:t>
-                      </a:r>
-                      <a:r>
-                        <a:rPr lang="en-IN" sz="1050" b="0" dirty="0" err="1">
-                          <a:solidFill>
-                            <a:srgbClr val="0A0A0A"/>
-                          </a:solidFill>
-                          <a:latin typeface="Times New Roman" panose="02020603050405020304" pitchFamily="18" charset="0"/>
-                        </a:rPr>
-                        <a:t>WiFi</a:t>
-                      </a:r>
-                      <a:r>
-                        <a:rPr lang="en-IN" sz="1050" b="0" dirty="0">
-                          <a:solidFill>
-                            <a:srgbClr val="0A0A0A"/>
-                          </a:solidFill>
-                          <a:latin typeface="Times New Roman" panose="02020603050405020304" pitchFamily="18" charset="0"/>
-                        </a:rPr>
-                        <a:t> Beacon + BLE + ESP-NOW)</a:t>
-                      </a:r>
-                    </a:p>
-                  </a:txBody>
-                  <a:tcPr>
-                    <a:solidFill>
-                      <a:srgbClr val="F0F0F0"/>
-                    </a:solidFill>
-                  </a:tcPr>
-                </a:tc>
-                <a:tc>
-                  <a:txBody>
-                    <a:bodyPr/>
-                    <a:lstStyle/>
-                    <a:p>
-                      <a:r>
-                        <a:rPr lang="en-IN" sz="1050" b="0" dirty="0">
-                          <a:solidFill>
-                            <a:srgbClr val="0A0A0A"/>
-                          </a:solidFill>
-                          <a:latin typeface="Times New Roman" panose="02020603050405020304" pitchFamily="18" charset="0"/>
-                        </a:rPr>
-                        <a:t>Sends GSM SMS alerts to owner &amp; police via SIM800L. Simultaneously broadcasts </a:t>
-                      </a:r>
-                      <a:r>
-                        <a:rPr lang="en-IN" sz="1050" b="0" dirty="0" err="1">
-                          <a:solidFill>
-                            <a:srgbClr val="0A0A0A"/>
-                          </a:solidFill>
-                          <a:latin typeface="Times New Roman" panose="02020603050405020304" pitchFamily="18" charset="0"/>
-                        </a:rPr>
-                        <a:t>WiFi</a:t>
-                      </a:r>
-                      <a:r>
-                        <a:rPr lang="en-IN" sz="1050" b="0" dirty="0">
-                          <a:solidFill>
-                            <a:srgbClr val="0A0A0A"/>
-                          </a:solidFill>
-                          <a:latin typeface="Times New Roman" panose="02020603050405020304" pitchFamily="18" charset="0"/>
-                        </a:rPr>
-                        <a:t> Beacon SSID (30m), BLE Eddystone (15m), and ESP-NOW Mesh Relay (200m+). Zero internet required.</a:t>
-                      </a:r>
-                    </a:p>
-                  </a:txBody>
-                  <a:tcPr>
-                    <a:solidFill>
-                      <a:srgbClr val="F0F0F0"/>
-                    </a:solidFill>
-                  </a:tcPr>
+              <a:tr h="472727">
+                <a:tc>
+                  <a:txBody>
+                    <a:bodyPr/>
+                    <a:lstStyle/>
+                    <a:p>
+                      <a:pPr algn="ctr">
+                        <a:defRPr sz="800" b="1">
+                          <a:solidFill>
+                            <a:srgbClr val="222222"/>
+                          </a:solidFill>
+                        </a:defRPr>
+                      </a:pPr>
+                      <a:r>
+                        <a:t>19</a:t>
+                      </a:r>
+                    </a:p>
+                  </a:txBody>
+                  <a:tcPr/>
+                </a:tc>
+                <a:tc>
+                  <a:txBody>
+                    <a:bodyPr/>
+                    <a:lstStyle/>
+                    <a:p>
+                      <a:pPr>
+                        <a:defRPr sz="650" b="0">
+                          <a:solidFill>
+                            <a:srgbClr val="222222"/>
+                          </a:solidFill>
+                        </a:defRPr>
+                      </a:pPr>
+                      <a:r>
+                        <a:t>Rahman et al., IEEE ICDEC, 2025 — 'IoT-Enabled Smart Door Lock with RFID, OTP and Intrusion Detection'</a:t>
+                      </a:r>
+                    </a:p>
+                  </a:txBody>
+                  <a:tcPr/>
+                </a:tc>
+                <a:tc>
+                  <a:txBody>
+                    <a:bodyPr/>
+                    <a:lstStyle/>
+                    <a:p>
+                      <a:pPr>
+                        <a:defRPr sz="700">
+                          <a:solidFill>
+                            <a:srgbClr val="222222"/>
+                          </a:solidFill>
+                        </a:defRPr>
+                      </a:pPr>
+                      <a:r>
+                        <a:t>ESP32 + RFID + OTP + relay-controlled solenoid lock for smart door security</a:t>
+                      </a:r>
+                    </a:p>
+                  </a:txBody>
+                  <a:tcPr/>
+                </a:tc>
+                <a:tc>
+                  <a:txBody>
+                    <a:bodyPr/>
+                    <a:lstStyle/>
+                    <a:p>
+                      <a:pPr>
+                        <a:defRPr sz="700">
+                          <a:solidFill>
+                            <a:srgbClr val="222222"/>
+                          </a:solidFill>
+                        </a:defRPr>
+                      </a:pPr>
+                      <a:r>
+                        <a:t>Same problem — auto door lock on intrusion; validates relay+solenoid approach</a:t>
+                      </a:r>
+                    </a:p>
+                  </a:txBody>
+                  <a:tcPr/>
+                </a:tc>
+                <a:tc>
+                  <a:txBody>
+                    <a:bodyPr/>
+                    <a:lstStyle/>
+                    <a:p>
+                      <a:pPr>
+                        <a:defRPr sz="700">
+                          <a:solidFill>
+                            <a:srgbClr val="222222"/>
+                          </a:solidFill>
+                        </a:defRPr>
+                      </a:pPr>
+                      <a:r>
+                        <a:t>PIR only (no radar), no multi-channel SOS, no AI visual confirmation</a:t>
+                      </a:r>
+                    </a:p>
+                  </a:txBody>
+                  <a:tcPr/>
                 </a:tc>
                 <a:extLst>
                   <a:ext uri="{0D108BD9-81ED-4DB2-BD59-A6C34878D82A}">
-                    <a16:rowId xmlns:a16="http://schemas.microsoft.com/office/drawing/2014/main" val="2112548265"/>
+                    <a16:rowId xmlns:a16="http://schemas.microsoft.com/office/drawing/2014/main" val="10004"/>
+                  </a:ext>
+                </a:extLst>
+              </a:tr>
+              <a:tr h="472727">
+                <a:tc>
+                  <a:txBody>
+                    <a:bodyPr/>
+                    <a:lstStyle/>
+                    <a:p>
+                      <a:pPr algn="ctr">
+                        <a:defRPr sz="800" b="1">
+                          <a:solidFill>
+                            <a:srgbClr val="222222"/>
+                          </a:solidFill>
+                        </a:defRPr>
+                      </a:pPr>
+                      <a:r>
+                        <a:t>20</a:t>
+                      </a:r>
+                    </a:p>
+                  </a:txBody>
+                  <a:tcPr>
+                    <a:solidFill>
+                      <a:srgbClr val="F9F9F9"/>
+                    </a:solidFill>
+                  </a:tcPr>
+                </a:tc>
+                <a:tc>
+                  <a:txBody>
+                    <a:bodyPr/>
+                    <a:lstStyle/>
+                    <a:p>
+                      <a:pPr>
+                        <a:defRPr sz="650" b="0">
+                          <a:solidFill>
+                            <a:srgbClr val="222222"/>
+                          </a:solidFill>
+                        </a:defRPr>
+                      </a:pPr>
+                      <a:r>
+                        <a:t>Ferrag et al., IEEE IoT Journal, 2025 — 'Edge-IIoTset: Comprehensive IoT Cyber Security Dataset'</a:t>
+                      </a:r>
+                    </a:p>
+                  </a:txBody>
+                  <a:tcPr>
+                    <a:solidFill>
+                      <a:srgbClr val="F9F9F9"/>
+                    </a:solidFill>
+                  </a:tcPr>
+                </a:tc>
+                <a:tc>
+                  <a:txBody>
+                    <a:bodyPr/>
+                    <a:lstStyle/>
+                    <a:p>
+                      <a:pPr>
+                        <a:defRPr sz="700">
+                          <a:solidFill>
+                            <a:srgbClr val="222222"/>
+                          </a:solidFill>
+                        </a:defRPr>
+                      </a:pPr>
+                      <a:r>
+                        <a:t>Edge-based federated learning for IoT intrusion detection at edge nodes</a:t>
+                      </a:r>
+                    </a:p>
+                  </a:txBody>
+                  <a:tcPr>
+                    <a:solidFill>
+                      <a:srgbClr val="F9F9F9"/>
+                    </a:solidFill>
+                  </a:tcPr>
+                </a:tc>
+                <a:tc>
+                  <a:txBody>
+                    <a:bodyPr/>
+                    <a:lstStyle/>
+                    <a:p>
+                      <a:pPr>
+                        <a:defRPr sz="700">
+                          <a:solidFill>
+                            <a:srgbClr val="222222"/>
+                          </a:solidFill>
+                        </a:defRPr>
+                      </a:pPr>
+                      <a:r>
+                        <a:t>Validates TRAPNET's edge-computing approach with ESP32 + RPi Zero 2W</a:t>
+                      </a:r>
+                    </a:p>
+                  </a:txBody>
+                  <a:tcPr>
+                    <a:solidFill>
+                      <a:srgbClr val="F9F9F9"/>
+                    </a:solidFill>
+                  </a:tcPr>
+                </a:tc>
+                <a:tc>
+                  <a:txBody>
+                    <a:bodyPr/>
+                    <a:lstStyle/>
+                    <a:p>
+                      <a:pPr>
+                        <a:defRPr sz="700">
+                          <a:solidFill>
+                            <a:srgbClr val="222222"/>
+                          </a:solidFill>
+                        </a:defRPr>
+                      </a:pPr>
+                      <a:r>
+                        <a:t>Cyber intrusion — not physical intrusion; no sensor hardware</a:t>
+                      </a:r>
+                    </a:p>
+                  </a:txBody>
+                  <a:tcPr>
+                    <a:solidFill>
+                      <a:srgbClr val="F9F9F9"/>
+                    </a:solidFill>
+                  </a:tcPr>
+                </a:tc>
+                <a:extLst>
+                  <a:ext uri="{0D108BD9-81ED-4DB2-BD59-A6C34878D82A}">
+                    <a16:rowId xmlns:a16="http://schemas.microsoft.com/office/drawing/2014/main" val="10005"/>
+                  </a:ext>
+                </a:extLst>
+              </a:tr>
+              <a:tr h="472727">
+                <a:tc>
+                  <a:txBody>
+                    <a:bodyPr/>
+                    <a:lstStyle/>
+                    <a:p>
+                      <a:pPr algn="ctr">
+                        <a:defRPr sz="800" b="1">
+                          <a:solidFill>
+                            <a:srgbClr val="222222"/>
+                          </a:solidFill>
+                        </a:defRPr>
+                      </a:pPr>
+                      <a:r>
+                        <a:t>21</a:t>
+                      </a:r>
+                    </a:p>
+                  </a:txBody>
+                  <a:tcPr/>
+                </a:tc>
+                <a:tc>
+                  <a:txBody>
+                    <a:bodyPr/>
+                    <a:lstStyle/>
+                    <a:p>
+                      <a:pPr>
+                        <a:defRPr sz="650" b="0">
+                          <a:solidFill>
+                            <a:srgbClr val="222222"/>
+                          </a:solidFill>
+                        </a:defRPr>
+                      </a:pPr>
+                      <a:r>
+                        <a:t>Akram et al., IEEE Trans. Consumer Elec., 2024 — 'Secure IoT Smart Home Using Sensor Fusion'</a:t>
+                      </a:r>
+                    </a:p>
+                  </a:txBody>
+                  <a:tcPr/>
+                </a:tc>
+                <a:tc>
+                  <a:txBody>
+                    <a:bodyPr/>
+                    <a:lstStyle/>
+                    <a:p>
+                      <a:pPr>
+                        <a:defRPr sz="700">
+                          <a:solidFill>
+                            <a:srgbClr val="222222"/>
+                          </a:solidFill>
+                        </a:defRPr>
+                      </a:pPr>
+                      <a:r>
+                        <a:t>Multi-sensor fusion (PIR + ultrasonic + camera) for false-alarm reduction</a:t>
+                      </a:r>
+                    </a:p>
+                  </a:txBody>
+                  <a:tcPr/>
+                </a:tc>
+                <a:tc>
+                  <a:txBody>
+                    <a:bodyPr/>
+                    <a:lstStyle/>
+                    <a:p>
+                      <a:pPr>
+                        <a:defRPr sz="700">
+                          <a:solidFill>
+                            <a:srgbClr val="222222"/>
+                          </a:solidFill>
+                        </a:defRPr>
+                      </a:pPr>
+                      <a:r>
+                        <a:t>Core concept overlap — multi-sensor fusion reduces false positives significantly</a:t>
+                      </a:r>
+                    </a:p>
+                  </a:txBody>
+                  <a:tcPr/>
+                </a:tc>
+                <a:tc>
+                  <a:txBody>
+                    <a:bodyPr/>
+                    <a:lstStyle/>
+                    <a:p>
+                      <a:pPr>
+                        <a:defRPr sz="700">
+                          <a:solidFill>
+                            <a:srgbClr val="222222"/>
+                          </a:solidFill>
+                        </a:defRPr>
+                      </a:pPr>
+                      <a:r>
+                        <a:t>No mmWave radar, no trapping, no multi-channel offline SOS</a:t>
+                      </a:r>
+                    </a:p>
+                  </a:txBody>
+                  <a:tcPr/>
+                </a:tc>
+                <a:extLst>
+                  <a:ext uri="{0D108BD9-81ED-4DB2-BD59-A6C34878D82A}">
+                    <a16:rowId xmlns:a16="http://schemas.microsoft.com/office/drawing/2014/main" val="10006"/>
+                  </a:ext>
+                </a:extLst>
+              </a:tr>
+              <a:tr h="472727">
+                <a:tc>
+                  <a:txBody>
+                    <a:bodyPr/>
+                    <a:lstStyle/>
+                    <a:p>
+                      <a:pPr algn="ctr">
+                        <a:defRPr sz="800" b="1">
+                          <a:solidFill>
+                            <a:srgbClr val="222222"/>
+                          </a:solidFill>
+                        </a:defRPr>
+                      </a:pPr>
+                      <a:r>
+                        <a:t>22</a:t>
+                      </a:r>
+                    </a:p>
+                  </a:txBody>
+                  <a:tcPr>
+                    <a:solidFill>
+                      <a:srgbClr val="F9F9F9"/>
+                    </a:solidFill>
+                  </a:tcPr>
+                </a:tc>
+                <a:tc>
+                  <a:txBody>
+                    <a:bodyPr/>
+                    <a:lstStyle/>
+                    <a:p>
+                      <a:pPr>
+                        <a:defRPr sz="650" b="0">
+                          <a:solidFill>
+                            <a:srgbClr val="222222"/>
+                          </a:solidFill>
+                        </a:defRPr>
+                      </a:pPr>
+                      <a:r>
+                        <a:t>Park et al., IEEE ICIT, 2024 — 'MeshSOS: ESP-NOW Based P2P Emergency Alert Relay System'</a:t>
+                      </a:r>
+                    </a:p>
+                  </a:txBody>
+                  <a:tcPr>
+                    <a:solidFill>
+                      <a:srgbClr val="F9F9F9"/>
+                    </a:solidFill>
+                  </a:tcPr>
+                </a:tc>
+                <a:tc>
+                  <a:txBody>
+                    <a:bodyPr/>
+                    <a:lstStyle/>
+                    <a:p>
+                      <a:pPr>
+                        <a:defRPr sz="700">
+                          <a:solidFill>
+                            <a:srgbClr val="222222"/>
+                          </a:solidFill>
+                        </a:defRPr>
+                      </a:pPr>
+                      <a:r>
+                        <a:t>ESP32 ESP-NOW peer-to-peer multi-hop relay for infrastructure-free emergency alerts</a:t>
+                      </a:r>
+                    </a:p>
+                  </a:txBody>
+                  <a:tcPr>
+                    <a:solidFill>
+                      <a:srgbClr val="F9F9F9"/>
+                    </a:solidFill>
+                  </a:tcPr>
+                </a:tc>
+                <a:tc>
+                  <a:txBody>
+                    <a:bodyPr/>
+                    <a:lstStyle/>
+                    <a:p>
+                      <a:pPr>
+                        <a:defRPr sz="700">
+                          <a:solidFill>
+                            <a:srgbClr val="222222"/>
+                          </a:solidFill>
+                        </a:defRPr>
+                      </a:pPr>
+                      <a:r>
+                        <a:t>Directly validates TRAPNET's ESP-NOW mesh relay SOS concept</a:t>
+                      </a:r>
+                    </a:p>
+                  </a:txBody>
+                  <a:tcPr>
+                    <a:solidFill>
+                      <a:srgbClr val="F9F9F9"/>
+                    </a:solidFill>
+                  </a:tcPr>
+                </a:tc>
+                <a:tc>
+                  <a:txBody>
+                    <a:bodyPr/>
+                    <a:lstStyle/>
+                    <a:p>
+                      <a:pPr>
+                        <a:defRPr sz="700">
+                          <a:solidFill>
+                            <a:srgbClr val="222222"/>
+                          </a:solidFill>
+                        </a:defRPr>
+                      </a:pPr>
+                      <a:r>
+                        <a:t>Worker safety (fall detection) — no intrusion detection, no door locking</a:t>
+                      </a:r>
+                    </a:p>
+                  </a:txBody>
+                  <a:tcPr>
+                    <a:solidFill>
+                      <a:srgbClr val="F9F9F9"/>
+                    </a:solidFill>
+                  </a:tcPr>
+                </a:tc>
+                <a:extLst>
+                  <a:ext uri="{0D108BD9-81ED-4DB2-BD59-A6C34878D82A}">
+                    <a16:rowId xmlns:a16="http://schemas.microsoft.com/office/drawing/2014/main" val="10007"/>
+                  </a:ext>
+                </a:extLst>
+              </a:tr>
+              <a:tr h="472727">
+                <a:tc>
+                  <a:txBody>
+                    <a:bodyPr/>
+                    <a:lstStyle/>
+                    <a:p>
+                      <a:pPr algn="ctr">
+                        <a:defRPr sz="800" b="1">
+                          <a:solidFill>
+                            <a:srgbClr val="222222"/>
+                          </a:solidFill>
+                        </a:defRPr>
+                      </a:pPr>
+                      <a:r>
+                        <a:t>23</a:t>
+                      </a:r>
+                    </a:p>
+                  </a:txBody>
+                  <a:tcPr/>
+                </a:tc>
+                <a:tc>
+                  <a:txBody>
+                    <a:bodyPr/>
+                    <a:lstStyle/>
+                    <a:p>
+                      <a:pPr>
+                        <a:defRPr sz="650" b="0">
+                          <a:solidFill>
+                            <a:srgbClr val="222222"/>
+                          </a:solidFill>
+                        </a:defRPr>
+                      </a:pPr>
+                      <a:r>
+                        <a:t>Kim et al., IEEE ICCE, 2024 — 'BLE Eddystone Indoor Emergency Notification System'</a:t>
+                      </a:r>
+                    </a:p>
+                  </a:txBody>
+                  <a:tcPr/>
+                </a:tc>
+                <a:tc>
+                  <a:txBody>
+                    <a:bodyPr/>
+                    <a:lstStyle/>
+                    <a:p>
+                      <a:pPr>
+                        <a:defRPr sz="700">
+                          <a:solidFill>
+                            <a:srgbClr val="222222"/>
+                          </a:solidFill>
+                        </a:defRPr>
+                      </a:pPr>
+                      <a:r>
+                        <a:t>BLE Eddystone telemetry for passive proximity-based alerts without app installation</a:t>
+                      </a:r>
+                    </a:p>
+                  </a:txBody>
+                  <a:tcPr/>
+                </a:tc>
+                <a:tc>
+                  <a:txBody>
+                    <a:bodyPr/>
+                    <a:lstStyle/>
+                    <a:p>
+                      <a:pPr>
+                        <a:defRPr sz="700">
+                          <a:solidFill>
+                            <a:srgbClr val="222222"/>
+                          </a:solidFill>
+                        </a:defRPr>
+                      </a:pPr>
+                      <a:r>
+                        <a:t>Validates TRAPNET's BLE Eddystone SOS broadcast approach</a:t>
+                      </a:r>
+                    </a:p>
+                  </a:txBody>
+                  <a:tcPr/>
+                </a:tc>
+                <a:tc>
+                  <a:txBody>
+                    <a:bodyPr/>
+                    <a:lstStyle/>
+                    <a:p>
+                      <a:pPr>
+                        <a:defRPr sz="700">
+                          <a:solidFill>
+                            <a:srgbClr val="222222"/>
+                          </a:solidFill>
+                        </a:defRPr>
+                      </a:pPr>
+                      <a:r>
+                        <a:t>BLE only — no WiFi beacon, no GSM, no ESP-NOW mesh</a:t>
+                      </a:r>
+                    </a:p>
+                  </a:txBody>
+                  <a:tcPr/>
+                </a:tc>
+                <a:extLst>
+                  <a:ext uri="{0D108BD9-81ED-4DB2-BD59-A6C34878D82A}">
+                    <a16:rowId xmlns:a16="http://schemas.microsoft.com/office/drawing/2014/main" val="10008"/>
+                  </a:ext>
+                </a:extLst>
+              </a:tr>
+              <a:tr h="472727">
+                <a:tc>
+                  <a:txBody>
+                    <a:bodyPr/>
+                    <a:lstStyle/>
+                    <a:p>
+                      <a:pPr algn="ctr">
+                        <a:defRPr sz="800" b="1">
+                          <a:solidFill>
+                            <a:srgbClr val="222222"/>
+                          </a:solidFill>
+                        </a:defRPr>
+                      </a:pPr>
+                      <a:r>
+                        <a:t>24</a:t>
+                      </a:r>
+                    </a:p>
+                  </a:txBody>
+                  <a:tcPr>
+                    <a:solidFill>
+                      <a:srgbClr val="F9F9F9"/>
+                    </a:solidFill>
+                  </a:tcPr>
+                </a:tc>
+                <a:tc>
+                  <a:txBody>
+                    <a:bodyPr/>
+                    <a:lstStyle/>
+                    <a:p>
+                      <a:pPr>
+                        <a:defRPr sz="650" b="0">
+                          <a:solidFill>
+                            <a:srgbClr val="222222"/>
+                          </a:solidFill>
+                        </a:defRPr>
+                      </a:pPr>
+                      <a:r>
+                        <a:t>Wang et al., IEEE AIEC, 2024 — 'Lightweight YOLOv8 on Raspberry Pi for Real-Time Security'</a:t>
+                      </a:r>
+                    </a:p>
+                  </a:txBody>
+                  <a:tcPr>
+                    <a:solidFill>
+                      <a:srgbClr val="F9F9F9"/>
+                    </a:solidFill>
+                  </a:tcPr>
+                </a:tc>
+                <a:tc>
+                  <a:txBody>
+                    <a:bodyPr/>
+                    <a:lstStyle/>
+                    <a:p>
+                      <a:pPr>
+                        <a:defRPr sz="700">
+                          <a:solidFill>
+                            <a:srgbClr val="222222"/>
+                          </a:solidFill>
+                        </a:defRPr>
+                      </a:pPr>
+                      <a:r>
+                        <a:t>Optimized YOLOv8 (INT8 quantization) on RPi for edge-based person detection</a:t>
+                      </a:r>
+                    </a:p>
+                  </a:txBody>
+                  <a:tcPr>
+                    <a:solidFill>
+                      <a:srgbClr val="F9F9F9"/>
+                    </a:solidFill>
+                  </a:tcPr>
+                </a:tc>
+                <a:tc>
+                  <a:txBody>
+                    <a:bodyPr/>
+                    <a:lstStyle/>
+                    <a:p>
+                      <a:pPr>
+                        <a:defRPr sz="700">
+                          <a:solidFill>
+                            <a:srgbClr val="222222"/>
+                          </a:solidFill>
+                        </a:defRPr>
+                      </a:pPr>
+                      <a:r>
+                        <a:t>Mirrors TRAPNET's AI pipeline — YOLOv8 on RPi Zero 2W for visual confirmation</a:t>
+                      </a:r>
+                    </a:p>
+                  </a:txBody>
+                  <a:tcPr>
+                    <a:solidFill>
+                      <a:srgbClr val="F9F9F9"/>
+                    </a:solidFill>
+                  </a:tcPr>
+                </a:tc>
+                <a:tc>
+                  <a:txBody>
+                    <a:bodyPr/>
+                    <a:lstStyle/>
+                    <a:p>
+                      <a:pPr>
+                        <a:defRPr sz="700">
+                          <a:solidFill>
+                            <a:srgbClr val="222222"/>
+                          </a:solidFill>
+                        </a:defRPr>
+                      </a:pPr>
+                      <a:r>
+                        <a:t>Camera only — no radar backup, no physical containment, no multi-SOS</a:t>
+                      </a:r>
+                    </a:p>
+                  </a:txBody>
+                  <a:tcPr>
+                    <a:solidFill>
+                      <a:srgbClr val="F9F9F9"/>
+                    </a:solidFill>
+                  </a:tcPr>
+                </a:tc>
+                <a:extLst>
+                  <a:ext uri="{0D108BD9-81ED-4DB2-BD59-A6C34878D82A}">
+                    <a16:rowId xmlns:a16="http://schemas.microsoft.com/office/drawing/2014/main" val="10009"/>
+                  </a:ext>
+                </a:extLst>
+              </a:tr>
+              <a:tr h="472730">
+                <a:tc>
+                  <a:txBody>
+                    <a:bodyPr/>
+                    <a:lstStyle/>
+                    <a:p>
+                      <a:pPr algn="ctr">
+                        <a:defRPr sz="800" b="1">
+                          <a:solidFill>
+                            <a:srgbClr val="222222"/>
+                          </a:solidFill>
+                        </a:defRPr>
+                      </a:pPr>
+                      <a:r>
+                        <a:t>25</a:t>
+                      </a:r>
+                    </a:p>
+                  </a:txBody>
+                  <a:tcPr/>
+                </a:tc>
+                <a:tc>
+                  <a:txBody>
+                    <a:bodyPr/>
+                    <a:lstStyle/>
+                    <a:p>
+                      <a:pPr>
+                        <a:defRPr sz="650" b="0">
+                          <a:solidFill>
+                            <a:srgbClr val="222222"/>
+                          </a:solidFill>
+                        </a:defRPr>
+                      </a:pPr>
+                      <a:r>
+                        <a:t>Singh et al., IEEE ICSIC, 2024 — 'IoT Structural Vibration Monitoring for Forced Entry Detection'</a:t>
+                      </a:r>
+                    </a:p>
+                  </a:txBody>
+                  <a:tcPr/>
+                </a:tc>
+                <a:tc>
+                  <a:txBody>
+                    <a:bodyPr/>
+                    <a:lstStyle/>
+                    <a:p>
+                      <a:pPr>
+                        <a:defRPr sz="700">
+                          <a:solidFill>
+                            <a:srgbClr val="222222"/>
+                          </a:solidFill>
+                        </a:defRPr>
+                      </a:pPr>
+                      <a:r>
+                        <a:t>Impulse counting with sliding window to distinguish forced entry from ambient noise</a:t>
+                      </a:r>
+                    </a:p>
+                  </a:txBody>
+                  <a:tcPr/>
+                </a:tc>
+                <a:tc>
+                  <a:txBody>
+                    <a:bodyPr/>
+                    <a:lstStyle/>
+                    <a:p>
+                      <a:pPr>
+                        <a:defRPr sz="700">
+                          <a:solidFill>
+                            <a:srgbClr val="222222"/>
+                          </a:solidFill>
+                        </a:defRPr>
+                      </a:pPr>
+                      <a:r>
+                        <a:t>Validates TRAPNET's SW-420 vibration sensor pulse-counting approach</a:t>
+                      </a:r>
+                    </a:p>
+                  </a:txBody>
+                  <a:tcPr/>
+                </a:tc>
+                <a:tc>
+                  <a:txBody>
+                    <a:bodyPr/>
+                    <a:lstStyle/>
+                    <a:p>
+                      <a:pPr>
+                        <a:defRPr sz="700">
+                          <a:solidFill>
+                            <a:srgbClr val="222222"/>
+                          </a:solidFill>
+                        </a:defRPr>
+                      </a:pPr>
+                      <a:r>
+                        <a:t>Monitoring only — no auto door locking, no radar, no SOS alerts</a:t>
+                      </a:r>
+                    </a:p>
+                  </a:txBody>
+                  <a:tcPr/>
+                </a:tc>
+                <a:extLst>
+                  <a:ext uri="{0D108BD9-81ED-4DB2-BD59-A6C34878D82A}">
+                    <a16:rowId xmlns:a16="http://schemas.microsoft.com/office/drawing/2014/main" val="10010"/>
                   </a:ext>
                 </a:extLst>
               </a:tr>
